--- a/pp/finalpp.pptx
+++ b/pp/finalpp.pptx
@@ -2,7 +2,7 @@
 <file path=ppt/presentation.xml><?xml version="1.0" encoding="utf-8"?>
 <p:presentation xmlns:a="http://schemas.openxmlformats.org/drawingml/2006/main" xmlns:r="http://schemas.openxmlformats.org/officeDocument/2006/relationships" xmlns:p="http://schemas.openxmlformats.org/presentationml/2006/main" saveSubsetFonts="1" autoCompressPictures="0">
   <p:sldMasterIdLst>
-    <p:sldMasterId id="2147483660" r:id="rId1"/>
+    <p:sldMasterId id="2147483672" r:id="rId1"/>
   </p:sldMasterIdLst>
   <p:sldIdLst>
     <p:sldId id="261" r:id="rId2"/>
@@ -11,6 +11,7 @@
     <p:sldId id="259" r:id="rId5"/>
     <p:sldId id="262" r:id="rId6"/>
     <p:sldId id="263" r:id="rId7"/>
+    <p:sldId id="264" r:id="rId8"/>
   </p:sldIdLst>
   <p:sldSz cx="12192000" cy="6858000"/>
   <p:notesSz cx="6858000" cy="9144000"/>
@@ -114,7 +115,7 @@
 
 <file path=ppt/slideLayouts/slideLayout1.xml><?xml version="1.0" encoding="utf-8"?>
 <p:sldLayout xmlns:a="http://schemas.openxmlformats.org/drawingml/2006/main" xmlns:r="http://schemas.openxmlformats.org/officeDocument/2006/relationships" xmlns:p="http://schemas.openxmlformats.org/presentationml/2006/main" type="title" preserve="1">
-  <p:cSld name="Title Slide">
+  <p:cSld name="タイトル スライド">
     <p:spTree>
       <p:nvGrpSpPr>
         <p:cNvPr id="1" name=""/>
@@ -131,10 +132,10 @@
       </p:grpSpPr>
       <p:sp>
         <p:nvSpPr>
-          <p:cNvPr id="2" name="Title 1">
-            <a:extLst>
-              <a:ext uri="{FF2B5EF4-FFF2-40B4-BE49-F238E27FC236}">
-                <a16:creationId xmlns:a16="http://schemas.microsoft.com/office/drawing/2014/main" id="{BBE736A0-9F24-45BF-B389-F6478DB45CE3}"/>
+          <p:cNvPr id="2" name="タイトル 1">
+            <a:extLst>
+              <a:ext uri="{FF2B5EF4-FFF2-40B4-BE49-F238E27FC236}">
+                <a16:creationId xmlns:a16="http://schemas.microsoft.com/office/drawing/2014/main" id="{661CB42B-96CE-344B-EA9F-D063C6DEBD46}"/>
               </a:ext>
             </a:extLst>
           </p:cNvPr>
@@ -147,40 +148,31 @@
         </p:nvSpPr>
         <p:spPr>
           <a:xfrm>
-            <a:off x="1524000" y="1028700"/>
-            <a:ext cx="9144000" cy="2481263"/>
+            <a:off x="1524000" y="1122363"/>
+            <a:ext cx="9144000" cy="2387600"/>
           </a:xfrm>
         </p:spPr>
         <p:txBody>
-          <a:bodyPr anchor="b">
-            <a:normAutofit/>
-          </a:bodyPr>
+          <a:bodyPr anchor="b"/>
           <a:lstStyle>
             <a:lvl1pPr algn="ctr">
-              <a:lnSpc>
-                <a:spcPct val="100000"/>
-              </a:lnSpc>
-              <a:defRPr sz="4000" spc="750" baseline="0">
-                <a:solidFill>
-                  <a:schemeClr val="tx1"/>
-                </a:solidFill>
-              </a:defRPr>
+              <a:defRPr sz="6000"/>
             </a:lvl1pPr>
           </a:lstStyle>
           <a:p>
             <a:r>
-              <a:rPr lang="en-US" dirty="0"/>
-              <a:t>Click to edit Master title style</a:t>
-            </a:r>
-          </a:p>
-        </p:txBody>
-      </p:sp>
-      <p:sp>
-        <p:nvSpPr>
-          <p:cNvPr id="3" name="Subtitle 2">
-            <a:extLst>
-              <a:ext uri="{FF2B5EF4-FFF2-40B4-BE49-F238E27FC236}">
-                <a16:creationId xmlns:a16="http://schemas.microsoft.com/office/drawing/2014/main" id="{713D85EF-076F-4C35-862A-BAFF685DD6B5}"/>
+              <a:rPr kumimoji="1" lang="ja-JP" altLang="en-US"/>
+              <a:t>マスター タイトルの書式設定</a:t>
+            </a:r>
+          </a:p>
+        </p:txBody>
+      </p:sp>
+      <p:sp>
+        <p:nvSpPr>
+          <p:cNvPr id="3" name="字幕 2">
+            <a:extLst>
+              <a:ext uri="{FF2B5EF4-FFF2-40B4-BE49-F238E27FC236}">
+                <a16:creationId xmlns:a16="http://schemas.microsoft.com/office/drawing/2014/main" id="{7431051D-F653-3F84-F5B0-BA7D707C413D}"/>
               </a:ext>
             </a:extLst>
           </p:cNvPr>
@@ -193,29 +185,24 @@
         </p:nvSpPr>
         <p:spPr>
           <a:xfrm>
-            <a:off x="1524000" y="3824376"/>
-            <a:ext cx="9144000" cy="1433423"/>
+            <a:off x="1524000" y="3602038"/>
+            <a:ext cx="9144000" cy="1655762"/>
           </a:xfrm>
         </p:spPr>
         <p:txBody>
-          <a:bodyPr>
-            <a:normAutofit/>
-          </a:bodyPr>
+          <a:bodyPr/>
           <a:lstStyle>
             <a:lvl1pPr marL="0" indent="0" algn="ctr">
-              <a:lnSpc>
-                <a:spcPct val="150000"/>
-              </a:lnSpc>
               <a:buNone/>
-              <a:defRPr sz="1600" b="1" cap="all" spc="600" baseline="0"/>
+              <a:defRPr sz="2400"/>
             </a:lvl1pPr>
             <a:lvl2pPr marL="457200" indent="0" algn="ctr">
               <a:buNone/>
-              <a:defRPr sz="1600"/>
+              <a:defRPr sz="2000"/>
             </a:lvl2pPr>
             <a:lvl3pPr marL="914400" indent="0" algn="ctr">
               <a:buNone/>
-              <a:defRPr sz="1600"/>
+              <a:defRPr sz="1800"/>
             </a:lvl3pPr>
             <a:lvl4pPr marL="1371600" indent="0" algn="ctr">
               <a:buNone/>
@@ -244,18 +231,18 @@
           </a:lstStyle>
           <a:p>
             <a:r>
-              <a:rPr lang="en-US" dirty="0"/>
-              <a:t>Click to edit Master subtitle style</a:t>
-            </a:r>
-          </a:p>
-        </p:txBody>
-      </p:sp>
-      <p:sp>
-        <p:nvSpPr>
-          <p:cNvPr id="4" name="Date Placeholder 3">
-            <a:extLst>
-              <a:ext uri="{FF2B5EF4-FFF2-40B4-BE49-F238E27FC236}">
-                <a16:creationId xmlns:a16="http://schemas.microsoft.com/office/drawing/2014/main" id="{CAE221EC-BF54-4DDD-8900-F2027CDAD35C}"/>
+              <a:rPr kumimoji="1" lang="ja-JP" altLang="en-US"/>
+              <a:t>マスター サブタイトルの書式設定</a:t>
+            </a:r>
+          </a:p>
+        </p:txBody>
+      </p:sp>
+      <p:sp>
+        <p:nvSpPr>
+          <p:cNvPr id="4" name="日付プレースホルダー 3">
+            <a:extLst>
+              <a:ext uri="{FF2B5EF4-FFF2-40B4-BE49-F238E27FC236}">
+                <a16:creationId xmlns:a16="http://schemas.microsoft.com/office/drawing/2014/main" id="{0321D926-833A-1376-871A-2C9C573CF7E0}"/>
               </a:ext>
             </a:extLst>
           </p:cNvPr>
@@ -271,8 +258,8 @@
           <a:bodyPr/>
           <a:lstStyle/>
           <a:p>
-            <a:fld id="{888411FB-1606-4EC5-9BCA-2DC04C2243EA}" type="datetimeFigureOut">
-              <a:rPr lang="en-US" dirty="0"/>
+            <a:fld id="{149C728D-416F-40D5-8F13-55E5DD1CE8D1}" type="datetimeFigureOut">
+              <a:rPr lang="en-US" smtClean="0"/>
               <a:t>6/29/25</a:t>
             </a:fld>
             <a:endParaRPr lang="en-US" dirty="0"/>
@@ -281,10 +268,10 @@
       </p:sp>
       <p:sp>
         <p:nvSpPr>
-          <p:cNvPr id="5" name="Footer Placeholder 4">
-            <a:extLst>
-              <a:ext uri="{FF2B5EF4-FFF2-40B4-BE49-F238E27FC236}">
-                <a16:creationId xmlns:a16="http://schemas.microsoft.com/office/drawing/2014/main" id="{7CD5AB69-7069-48FB-8925-F2BA84129A52}"/>
+          <p:cNvPr id="5" name="フッター プレースホルダー 4">
+            <a:extLst>
+              <a:ext uri="{FF2B5EF4-FFF2-40B4-BE49-F238E27FC236}">
+                <a16:creationId xmlns:a16="http://schemas.microsoft.com/office/drawing/2014/main" id="{11FDEF10-E53E-C831-BC5C-1F1869951688}"/>
               </a:ext>
             </a:extLst>
           </p:cNvPr>
@@ -301,19 +288,20 @@
           <a:lstStyle/>
           <a:p>
             <a:r>
-              <a:rPr lang="en-US" dirty="0"/>
+              <a:rPr lang="en-US"/>
               <a:t>
               </a:t>
             </a:r>
-          </a:p>
-        </p:txBody>
-      </p:sp>
-      <p:sp>
-        <p:nvSpPr>
-          <p:cNvPr id="6" name="Slide Number Placeholder 5">
-            <a:extLst>
-              <a:ext uri="{FF2B5EF4-FFF2-40B4-BE49-F238E27FC236}">
-                <a16:creationId xmlns:a16="http://schemas.microsoft.com/office/drawing/2014/main" id="{3B29C32A-F7A5-4E3B-A28F-09C82341EB22}"/>
+            <a:endParaRPr lang="en-US" dirty="0"/>
+          </a:p>
+        </p:txBody>
+      </p:sp>
+      <p:sp>
+        <p:nvSpPr>
+          <p:cNvPr id="6" name="スライド番号プレースホルダー 5">
+            <a:extLst>
+              <a:ext uri="{FF2B5EF4-FFF2-40B4-BE49-F238E27FC236}">
+                <a16:creationId xmlns:a16="http://schemas.microsoft.com/office/drawing/2014/main" id="{CC6EECD2-A313-10BC-531F-1F5D21F52086}"/>
               </a:ext>
             </a:extLst>
           </p:cNvPr>
@@ -330,7 +318,7 @@
           <a:lstStyle/>
           <a:p>
             <a:fld id="{017DE1FC-E54A-4B87-A814-263D1E8654B2}" type="slidenum">
-              <a:rPr lang="en-US" dirty="0"/>
+              <a:rPr lang="en-US" smtClean="0"/>
               <a:t>‹#›</a:t>
             </a:fld>
             <a:endParaRPr lang="en-US" dirty="0"/>
@@ -340,19 +328,20 @@
     </p:spTree>
     <p:extLst>
       <p:ext uri="{BB962C8B-B14F-4D97-AF65-F5344CB8AC3E}">
-        <p14:creationId xmlns:p14="http://schemas.microsoft.com/office/powerpoint/2010/main" val="3571082175"/>
+        <p14:creationId xmlns:p14="http://schemas.microsoft.com/office/powerpoint/2010/main" val="1108654445"/>
       </p:ext>
     </p:extLst>
   </p:cSld>
   <p:clrMapOvr>
     <a:masterClrMapping/>
   </p:clrMapOvr>
+  <p:hf hdr="0"/>
 </p:sldLayout>
 </file>
 
 <file path=ppt/slideLayouts/slideLayout10.xml><?xml version="1.0" encoding="utf-8"?>
 <p:sldLayout xmlns:a="http://schemas.openxmlformats.org/drawingml/2006/main" xmlns:r="http://schemas.openxmlformats.org/officeDocument/2006/relationships" xmlns:p="http://schemas.openxmlformats.org/presentationml/2006/main" type="vertTx" preserve="1">
-  <p:cSld name="Title and Vertical Text">
+  <p:cSld name="タイトルと縦書きテキスト">
     <p:spTree>
       <p:nvGrpSpPr>
         <p:cNvPr id="1" name=""/>
@@ -369,10 +358,10 @@
       </p:grpSpPr>
       <p:sp>
         <p:nvSpPr>
-          <p:cNvPr id="2" name="Title 1">
-            <a:extLst>
-              <a:ext uri="{FF2B5EF4-FFF2-40B4-BE49-F238E27FC236}">
-                <a16:creationId xmlns:a16="http://schemas.microsoft.com/office/drawing/2014/main" id="{2FCA997B-D473-47DE-8B7B-22AB6F31E4E3}"/>
+          <p:cNvPr id="2" name="タイトル 1">
+            <a:extLst>
+              <a:ext uri="{FF2B5EF4-FFF2-40B4-BE49-F238E27FC236}">
+                <a16:creationId xmlns:a16="http://schemas.microsoft.com/office/drawing/2014/main" id="{7FC9A3E6-2596-36C8-D22C-660E6244A012}"/>
               </a:ext>
             </a:extLst>
           </p:cNvPr>
@@ -389,18 +378,18 @@
           <a:lstStyle/>
           <a:p>
             <a:r>
-              <a:rPr lang="en-US" dirty="0"/>
-              <a:t>Click to edit Master title style</a:t>
-            </a:r>
-          </a:p>
-        </p:txBody>
-      </p:sp>
-      <p:sp>
-        <p:nvSpPr>
-          <p:cNvPr id="3" name="Vertical Text Placeholder 2">
-            <a:extLst>
-              <a:ext uri="{FF2B5EF4-FFF2-40B4-BE49-F238E27FC236}">
-                <a16:creationId xmlns:a16="http://schemas.microsoft.com/office/drawing/2014/main" id="{75526035-4B81-4537-A22D-92C2E0DBB615}"/>
+              <a:rPr kumimoji="1" lang="ja-JP" altLang="en-US"/>
+              <a:t>マスター タイトルの書式設定</a:t>
+            </a:r>
+          </a:p>
+        </p:txBody>
+      </p:sp>
+      <p:sp>
+        <p:nvSpPr>
+          <p:cNvPr id="3" name="縦書きテキスト プレースホルダー 2">
+            <a:extLst>
+              <a:ext uri="{FF2B5EF4-FFF2-40B4-BE49-F238E27FC236}">
+                <a16:creationId xmlns:a16="http://schemas.microsoft.com/office/drawing/2014/main" id="{8E5E1240-47BA-F1C6-1CF6-6B423A87EC5E}"/>
               </a:ext>
             </a:extLst>
           </p:cNvPr>
@@ -418,46 +407,78 @@
           <a:p>
             <a:pPr lvl="0"/>
             <a:r>
-              <a:rPr lang="en-US" dirty="0"/>
-              <a:t>Click to edit Master text styles</a:t>
+              <a:rPr kumimoji="1" lang="ja-JP" altLang="en-US"/>
+              <a:t>マスター テキストの書式設定</a:t>
             </a:r>
           </a:p>
           <a:p>
             <a:pPr lvl="1"/>
             <a:r>
-              <a:rPr lang="en-US" dirty="0"/>
-              <a:t>Second level</a:t>
+              <a:rPr kumimoji="1" lang="ja-JP" altLang="en-US"/>
+              <a:t>第 </a:t>
+            </a:r>
+            <a:r>
+              <a:rPr kumimoji="1" lang="en-US" altLang="ja-JP"/>
+              <a:t>2 </a:t>
+            </a:r>
+            <a:r>
+              <a:rPr kumimoji="1" lang="ja-JP" altLang="en-US"/>
+              <a:t>レベル</a:t>
             </a:r>
           </a:p>
           <a:p>
             <a:pPr lvl="2"/>
             <a:r>
-              <a:rPr lang="en-US" dirty="0"/>
-              <a:t>Third level</a:t>
+              <a:rPr kumimoji="1" lang="ja-JP" altLang="en-US"/>
+              <a:t>第 </a:t>
+            </a:r>
+            <a:r>
+              <a:rPr kumimoji="1" lang="en-US" altLang="ja-JP"/>
+              <a:t>3 </a:t>
+            </a:r>
+            <a:r>
+              <a:rPr kumimoji="1" lang="ja-JP" altLang="en-US"/>
+              <a:t>レベル</a:t>
             </a:r>
           </a:p>
           <a:p>
             <a:pPr lvl="3"/>
             <a:r>
-              <a:rPr lang="en-US" dirty="0"/>
-              <a:t>Fourth level</a:t>
+              <a:rPr kumimoji="1" lang="ja-JP" altLang="en-US"/>
+              <a:t>第 </a:t>
+            </a:r>
+            <a:r>
+              <a:rPr kumimoji="1" lang="en-US" altLang="ja-JP"/>
+              <a:t>4 </a:t>
+            </a:r>
+            <a:r>
+              <a:rPr kumimoji="1" lang="ja-JP" altLang="en-US"/>
+              <a:t>レベル</a:t>
             </a:r>
           </a:p>
           <a:p>
             <a:pPr lvl="4"/>
             <a:r>
-              <a:rPr lang="en-US" dirty="0"/>
-              <a:t>Fifth level</a:t>
-            </a:r>
-          </a:p>
-        </p:txBody>
-      </p:sp>
-      <p:sp>
-        <p:nvSpPr>
-          <p:cNvPr id="4" name="Date Placeholder 3">
-            <a:extLst>
-              <a:ext uri="{FF2B5EF4-FFF2-40B4-BE49-F238E27FC236}">
-                <a16:creationId xmlns:a16="http://schemas.microsoft.com/office/drawing/2014/main" id="{0EC2A44D-F637-4017-BAA2-77756A386D98}"/>
+              <a:rPr kumimoji="1" lang="ja-JP" altLang="en-US"/>
+              <a:t>第 </a:t>
+            </a:r>
+            <a:r>
+              <a:rPr kumimoji="1" lang="en-US" altLang="ja-JP"/>
+              <a:t>5 </a:t>
+            </a:r>
+            <a:r>
+              <a:rPr kumimoji="1" lang="ja-JP" altLang="en-US"/>
+              <a:t>レベル</a:t>
+            </a:r>
+          </a:p>
+        </p:txBody>
+      </p:sp>
+      <p:sp>
+        <p:nvSpPr>
+          <p:cNvPr id="4" name="日付プレースホルダー 3">
+            <a:extLst>
+              <a:ext uri="{FF2B5EF4-FFF2-40B4-BE49-F238E27FC236}">
+                <a16:creationId xmlns:a16="http://schemas.microsoft.com/office/drawing/2014/main" id="{74ED2A82-C937-123A-FF75-03653F8F7542}"/>
               </a:ext>
             </a:extLst>
           </p:cNvPr>
@@ -473,8 +494,8 @@
           <a:bodyPr/>
           <a:lstStyle/>
           <a:p>
-            <a:fld id="{EE1F3D07-6BCF-40BC-A7F7-89BB8FFE98C6}" type="datetimeFigureOut">
-              <a:rPr lang="en-US" dirty="0"/>
+            <a:fld id="{149C728D-416F-40D5-8F13-55E5DD1CE8D1}" type="datetimeFigureOut">
+              <a:rPr lang="en-US" smtClean="0"/>
               <a:t>6/29/25</a:t>
             </a:fld>
             <a:endParaRPr lang="en-US" dirty="0"/>
@@ -483,10 +504,10 @@
       </p:sp>
       <p:sp>
         <p:nvSpPr>
-          <p:cNvPr id="5" name="Footer Placeholder 4">
-            <a:extLst>
-              <a:ext uri="{FF2B5EF4-FFF2-40B4-BE49-F238E27FC236}">
-                <a16:creationId xmlns:a16="http://schemas.microsoft.com/office/drawing/2014/main" id="{EEC1DCE6-ED7D-417C-ABD4-41D61570FF3C}"/>
+          <p:cNvPr id="5" name="フッター プレースホルダー 4">
+            <a:extLst>
+              <a:ext uri="{FF2B5EF4-FFF2-40B4-BE49-F238E27FC236}">
+                <a16:creationId xmlns:a16="http://schemas.microsoft.com/office/drawing/2014/main" id="{E8CEE147-8A33-552C-ACDC-11C4A931CD05}"/>
               </a:ext>
             </a:extLst>
           </p:cNvPr>
@@ -503,19 +524,20 @@
           <a:lstStyle/>
           <a:p>
             <a:r>
-              <a:rPr lang="en-US" dirty="0"/>
+              <a:rPr lang="en-US"/>
               <a:t>
               </a:t>
             </a:r>
-          </a:p>
-        </p:txBody>
-      </p:sp>
-      <p:sp>
-        <p:nvSpPr>
-          <p:cNvPr id="6" name="Slide Number Placeholder 5">
-            <a:extLst>
-              <a:ext uri="{FF2B5EF4-FFF2-40B4-BE49-F238E27FC236}">
-                <a16:creationId xmlns:a16="http://schemas.microsoft.com/office/drawing/2014/main" id="{2CAAF19A-FDAE-446A-A6B6-128F7F96A966}"/>
+            <a:endParaRPr lang="en-US" dirty="0"/>
+          </a:p>
+        </p:txBody>
+      </p:sp>
+      <p:sp>
+        <p:nvSpPr>
+          <p:cNvPr id="6" name="スライド番号プレースホルダー 5">
+            <a:extLst>
+              <a:ext uri="{FF2B5EF4-FFF2-40B4-BE49-F238E27FC236}">
+                <a16:creationId xmlns:a16="http://schemas.microsoft.com/office/drawing/2014/main" id="{52F60B15-2D59-9EFA-8E11-95645894E60C}"/>
               </a:ext>
             </a:extLst>
           </p:cNvPr>
@@ -532,7 +554,7 @@
           <a:lstStyle/>
           <a:p>
             <a:fld id="{017DE1FC-E54A-4B87-A814-263D1E8654B2}" type="slidenum">
-              <a:rPr lang="en-US" dirty="0"/>
+              <a:rPr lang="en-US" smtClean="0"/>
               <a:t>‹#›</a:t>
             </a:fld>
             <a:endParaRPr lang="en-US" dirty="0"/>
@@ -542,19 +564,20 @@
     </p:spTree>
     <p:extLst>
       <p:ext uri="{BB962C8B-B14F-4D97-AF65-F5344CB8AC3E}">
-        <p14:creationId xmlns:p14="http://schemas.microsoft.com/office/powerpoint/2010/main" val="596971793"/>
+        <p14:creationId xmlns:p14="http://schemas.microsoft.com/office/powerpoint/2010/main" val="2957428247"/>
       </p:ext>
     </p:extLst>
   </p:cSld>
   <p:clrMapOvr>
     <a:masterClrMapping/>
   </p:clrMapOvr>
+  <p:hf hdr="0"/>
 </p:sldLayout>
 </file>
 
 <file path=ppt/slideLayouts/slideLayout11.xml><?xml version="1.0" encoding="utf-8"?>
 <p:sldLayout xmlns:a="http://schemas.openxmlformats.org/drawingml/2006/main" xmlns:r="http://schemas.openxmlformats.org/officeDocument/2006/relationships" xmlns:p="http://schemas.openxmlformats.org/presentationml/2006/main" type="vertTitleAndTx" preserve="1">
-  <p:cSld name="Vertical Title and Text">
+  <p:cSld name="縦書きタイトルと&#10;縦書きテキスト">
     <p:spTree>
       <p:nvGrpSpPr>
         <p:cNvPr id="1" name=""/>
@@ -571,10 +594,10 @@
       </p:grpSpPr>
       <p:sp>
         <p:nvSpPr>
-          <p:cNvPr id="2" name="Vertical Title 1">
-            <a:extLst>
-              <a:ext uri="{FF2B5EF4-FFF2-40B4-BE49-F238E27FC236}">
-                <a16:creationId xmlns:a16="http://schemas.microsoft.com/office/drawing/2014/main" id="{BC96D838-45E9-4D61-AA4E-92A32B579FDA}"/>
+          <p:cNvPr id="2" name="縦書きタイトル 1">
+            <a:extLst>
+              <a:ext uri="{FF2B5EF4-FFF2-40B4-BE49-F238E27FC236}">
+                <a16:creationId xmlns:a16="http://schemas.microsoft.com/office/drawing/2014/main" id="{64E1A4D8-0A5C-0521-4C01-2793261A09CD}"/>
               </a:ext>
             </a:extLst>
           </p:cNvPr>
@@ -587,8 +610,8 @@
         </p:nvSpPr>
         <p:spPr>
           <a:xfrm>
-            <a:off x="8724900" y="457199"/>
-            <a:ext cx="2628900" cy="5719763"/>
+            <a:off x="8724900" y="365125"/>
+            <a:ext cx="2628900" cy="5811838"/>
           </a:xfrm>
         </p:spPr>
         <p:txBody>
@@ -596,18 +619,18 @@
           <a:lstStyle/>
           <a:p>
             <a:r>
-              <a:rPr lang="en-US" dirty="0"/>
-              <a:t>Click to edit Master title style</a:t>
-            </a:r>
-          </a:p>
-        </p:txBody>
-      </p:sp>
-      <p:sp>
-        <p:nvSpPr>
-          <p:cNvPr id="3" name="Vertical Text Placeholder 2">
-            <a:extLst>
-              <a:ext uri="{FF2B5EF4-FFF2-40B4-BE49-F238E27FC236}">
-                <a16:creationId xmlns:a16="http://schemas.microsoft.com/office/drawing/2014/main" id="{2C3183D0-4392-4364-8A2D-C47A2AF7A87D}"/>
+              <a:rPr kumimoji="1" lang="ja-JP" altLang="en-US"/>
+              <a:t>マスター タイトルの書式設定</a:t>
+            </a:r>
+          </a:p>
+        </p:txBody>
+      </p:sp>
+      <p:sp>
+        <p:nvSpPr>
+          <p:cNvPr id="3" name="縦書きテキスト プレースホルダー 2">
+            <a:extLst>
+              <a:ext uri="{FF2B5EF4-FFF2-40B4-BE49-F238E27FC236}">
+                <a16:creationId xmlns:a16="http://schemas.microsoft.com/office/drawing/2014/main" id="{3A565F9E-4520-D8F4-4C1E-78CB57810F02}"/>
               </a:ext>
             </a:extLst>
           </p:cNvPr>
@@ -620,8 +643,8 @@
         </p:nvSpPr>
         <p:spPr>
           <a:xfrm>
-            <a:off x="838200" y="457199"/>
-            <a:ext cx="7734300" cy="5719763"/>
+            <a:off x="838200" y="365125"/>
+            <a:ext cx="7734300" cy="5811838"/>
           </a:xfrm>
         </p:spPr>
         <p:txBody>
@@ -630,46 +653,78 @@
           <a:p>
             <a:pPr lvl="0"/>
             <a:r>
-              <a:rPr lang="en-US" dirty="0"/>
-              <a:t>Click to edit Master text styles</a:t>
+              <a:rPr kumimoji="1" lang="ja-JP" altLang="en-US"/>
+              <a:t>マスター テキストの書式設定</a:t>
             </a:r>
           </a:p>
           <a:p>
             <a:pPr lvl="1"/>
             <a:r>
-              <a:rPr lang="en-US" dirty="0"/>
-              <a:t>Second level</a:t>
+              <a:rPr kumimoji="1" lang="ja-JP" altLang="en-US"/>
+              <a:t>第 </a:t>
+            </a:r>
+            <a:r>
+              <a:rPr kumimoji="1" lang="en-US" altLang="ja-JP"/>
+              <a:t>2 </a:t>
+            </a:r>
+            <a:r>
+              <a:rPr kumimoji="1" lang="ja-JP" altLang="en-US"/>
+              <a:t>レベル</a:t>
             </a:r>
           </a:p>
           <a:p>
             <a:pPr lvl="2"/>
             <a:r>
-              <a:rPr lang="en-US" dirty="0"/>
-              <a:t>Third level</a:t>
+              <a:rPr kumimoji="1" lang="ja-JP" altLang="en-US"/>
+              <a:t>第 </a:t>
+            </a:r>
+            <a:r>
+              <a:rPr kumimoji="1" lang="en-US" altLang="ja-JP"/>
+              <a:t>3 </a:t>
+            </a:r>
+            <a:r>
+              <a:rPr kumimoji="1" lang="ja-JP" altLang="en-US"/>
+              <a:t>レベル</a:t>
             </a:r>
           </a:p>
           <a:p>
             <a:pPr lvl="3"/>
             <a:r>
-              <a:rPr lang="en-US" dirty="0"/>
-              <a:t>Fourth level</a:t>
+              <a:rPr kumimoji="1" lang="ja-JP" altLang="en-US"/>
+              <a:t>第 </a:t>
+            </a:r>
+            <a:r>
+              <a:rPr kumimoji="1" lang="en-US" altLang="ja-JP"/>
+              <a:t>4 </a:t>
+            </a:r>
+            <a:r>
+              <a:rPr kumimoji="1" lang="ja-JP" altLang="en-US"/>
+              <a:t>レベル</a:t>
             </a:r>
           </a:p>
           <a:p>
             <a:pPr lvl="4"/>
             <a:r>
-              <a:rPr lang="en-US" dirty="0"/>
-              <a:t>Fifth level</a:t>
-            </a:r>
-          </a:p>
-        </p:txBody>
-      </p:sp>
-      <p:sp>
-        <p:nvSpPr>
-          <p:cNvPr id="4" name="Date Placeholder 3">
-            <a:extLst>
-              <a:ext uri="{FF2B5EF4-FFF2-40B4-BE49-F238E27FC236}">
-                <a16:creationId xmlns:a16="http://schemas.microsoft.com/office/drawing/2014/main" id="{DB4A36C9-28D5-4820-84F1-E4B9F4E50FA9}"/>
+              <a:rPr kumimoji="1" lang="ja-JP" altLang="en-US"/>
+              <a:t>第 </a:t>
+            </a:r>
+            <a:r>
+              <a:rPr kumimoji="1" lang="en-US" altLang="ja-JP"/>
+              <a:t>5 </a:t>
+            </a:r>
+            <a:r>
+              <a:rPr kumimoji="1" lang="ja-JP" altLang="en-US"/>
+              <a:t>レベル</a:t>
+            </a:r>
+          </a:p>
+        </p:txBody>
+      </p:sp>
+      <p:sp>
+        <p:nvSpPr>
+          <p:cNvPr id="4" name="日付プレースホルダー 3">
+            <a:extLst>
+              <a:ext uri="{FF2B5EF4-FFF2-40B4-BE49-F238E27FC236}">
+                <a16:creationId xmlns:a16="http://schemas.microsoft.com/office/drawing/2014/main" id="{01387D2C-DDFF-A467-A311-1EECF82438C0}"/>
               </a:ext>
             </a:extLst>
           </p:cNvPr>
@@ -685,8 +740,8 @@
           <a:bodyPr/>
           <a:lstStyle/>
           <a:p>
-            <a:fld id="{CED16D97-0980-426F-BEA7-F6EB2DE3AC08}" type="datetimeFigureOut">
-              <a:rPr lang="en-US" dirty="0"/>
+            <a:fld id="{149C728D-416F-40D5-8F13-55E5DD1CE8D1}" type="datetimeFigureOut">
+              <a:rPr lang="en-US" smtClean="0"/>
               <a:t>6/29/25</a:t>
             </a:fld>
             <a:endParaRPr lang="en-US" dirty="0"/>
@@ -695,10 +750,10 @@
       </p:sp>
       <p:sp>
         <p:nvSpPr>
-          <p:cNvPr id="5" name="Footer Placeholder 4">
-            <a:extLst>
-              <a:ext uri="{FF2B5EF4-FFF2-40B4-BE49-F238E27FC236}">
-                <a16:creationId xmlns:a16="http://schemas.microsoft.com/office/drawing/2014/main" id="{8997EDC8-558D-4646-86D9-A5424CF2A2BA}"/>
+          <p:cNvPr id="5" name="フッター プレースホルダー 4">
+            <a:extLst>
+              <a:ext uri="{FF2B5EF4-FFF2-40B4-BE49-F238E27FC236}">
+                <a16:creationId xmlns:a16="http://schemas.microsoft.com/office/drawing/2014/main" id="{B3709ADF-8DB1-D439-7B76-810A32470ED6}"/>
               </a:ext>
             </a:extLst>
           </p:cNvPr>
@@ -715,19 +770,20 @@
           <a:lstStyle/>
           <a:p>
             <a:r>
-              <a:rPr lang="en-US" dirty="0"/>
+              <a:rPr lang="en-US"/>
               <a:t>
               </a:t>
             </a:r>
-          </a:p>
-        </p:txBody>
-      </p:sp>
-      <p:sp>
-        <p:nvSpPr>
-          <p:cNvPr id="6" name="Slide Number Placeholder 5">
-            <a:extLst>
-              <a:ext uri="{FF2B5EF4-FFF2-40B4-BE49-F238E27FC236}">
-                <a16:creationId xmlns:a16="http://schemas.microsoft.com/office/drawing/2014/main" id="{6F0B7537-E67A-411A-BBA4-061521D3D881}"/>
+            <a:endParaRPr lang="en-US" dirty="0"/>
+          </a:p>
+        </p:txBody>
+      </p:sp>
+      <p:sp>
+        <p:nvSpPr>
+          <p:cNvPr id="6" name="スライド番号プレースホルダー 5">
+            <a:extLst>
+              <a:ext uri="{FF2B5EF4-FFF2-40B4-BE49-F238E27FC236}">
+                <a16:creationId xmlns:a16="http://schemas.microsoft.com/office/drawing/2014/main" id="{BB0F78EB-0227-358B-409D-9743F554E6A5}"/>
               </a:ext>
             </a:extLst>
           </p:cNvPr>
@@ -744,7 +800,7 @@
           <a:lstStyle/>
           <a:p>
             <a:fld id="{017DE1FC-E54A-4B87-A814-263D1E8654B2}" type="slidenum">
-              <a:rPr lang="en-US" dirty="0"/>
+              <a:rPr lang="en-US" smtClean="0"/>
               <a:t>‹#›</a:t>
             </a:fld>
             <a:endParaRPr lang="en-US" dirty="0"/>
@@ -754,19 +810,20 @@
     </p:spTree>
     <p:extLst>
       <p:ext uri="{BB962C8B-B14F-4D97-AF65-F5344CB8AC3E}">
-        <p14:creationId xmlns:p14="http://schemas.microsoft.com/office/powerpoint/2010/main" val="1300360073"/>
+        <p14:creationId xmlns:p14="http://schemas.microsoft.com/office/powerpoint/2010/main" val="2754152486"/>
       </p:ext>
     </p:extLst>
   </p:cSld>
   <p:clrMapOvr>
     <a:masterClrMapping/>
   </p:clrMapOvr>
+  <p:hf hdr="0"/>
 </p:sldLayout>
 </file>
 
 <file path=ppt/slideLayouts/slideLayout2.xml><?xml version="1.0" encoding="utf-8"?>
 <p:sldLayout xmlns:a="http://schemas.openxmlformats.org/drawingml/2006/main" xmlns:r="http://schemas.openxmlformats.org/officeDocument/2006/relationships" xmlns:p="http://schemas.openxmlformats.org/presentationml/2006/main" type="obj" preserve="1">
-  <p:cSld name="Title and Content">
+  <p:cSld name="タイトルとコンテンツ">
     <p:spTree>
       <p:nvGrpSpPr>
         <p:cNvPr id="1" name=""/>
@@ -783,10 +840,10 @@
       </p:grpSpPr>
       <p:sp>
         <p:nvSpPr>
-          <p:cNvPr id="2" name="Title 1">
-            <a:extLst>
-              <a:ext uri="{FF2B5EF4-FFF2-40B4-BE49-F238E27FC236}">
-                <a16:creationId xmlns:a16="http://schemas.microsoft.com/office/drawing/2014/main" id="{1F8E99D7-1EE5-4262-9359-A0E2B733116C}"/>
+          <p:cNvPr id="2" name="タイトル 1">
+            <a:extLst>
+              <a:ext uri="{FF2B5EF4-FFF2-40B4-BE49-F238E27FC236}">
+                <a16:creationId xmlns:a16="http://schemas.microsoft.com/office/drawing/2014/main" id="{34BC061D-BCA0-0C70-79A2-42B8BD7FFB18}"/>
               </a:ext>
             </a:extLst>
           </p:cNvPr>
@@ -797,29 +854,24 @@
             <p:ph type="title"/>
           </p:nvPr>
         </p:nvSpPr>
-        <p:spPr>
-          <a:xfrm>
-            <a:off x="1371600" y="793080"/>
-            <a:ext cx="10240903" cy="1233488"/>
-          </a:xfrm>
-        </p:spPr>
+        <p:spPr/>
         <p:txBody>
           <a:bodyPr/>
           <a:lstStyle/>
           <a:p>
             <a:r>
-              <a:rPr lang="en-US" dirty="0"/>
-              <a:t>Click to edit Master title style</a:t>
-            </a:r>
-          </a:p>
-        </p:txBody>
-      </p:sp>
-      <p:sp>
-        <p:nvSpPr>
-          <p:cNvPr id="3" name="Content Placeholder 2">
-            <a:extLst>
-              <a:ext uri="{FF2B5EF4-FFF2-40B4-BE49-F238E27FC236}">
-                <a16:creationId xmlns:a16="http://schemas.microsoft.com/office/drawing/2014/main" id="{2B3DA1C5-272A-45C2-A11A-E7769A27D32F}"/>
+              <a:rPr kumimoji="1" lang="ja-JP" altLang="en-US"/>
+              <a:t>マスター タイトルの書式設定</a:t>
+            </a:r>
+          </a:p>
+        </p:txBody>
+      </p:sp>
+      <p:sp>
+        <p:nvSpPr>
+          <p:cNvPr id="3" name="コンテンツ プレースホルダー 2">
+            <a:extLst>
+              <a:ext uri="{FF2B5EF4-FFF2-40B4-BE49-F238E27FC236}">
+                <a16:creationId xmlns:a16="http://schemas.microsoft.com/office/drawing/2014/main" id="{F32F727A-E65C-1004-0B58-9642DE129A57}"/>
               </a:ext>
             </a:extLst>
           </p:cNvPr>
@@ -830,58 +882,85 @@
             <p:ph idx="1"/>
           </p:nvPr>
         </p:nvSpPr>
-        <p:spPr>
-          <a:xfrm>
-            <a:off x="1371600" y="2114939"/>
-            <a:ext cx="10240903" cy="3956179"/>
-          </a:xfrm>
-        </p:spPr>
+        <p:spPr/>
         <p:txBody>
           <a:bodyPr/>
           <a:lstStyle/>
           <a:p>
             <a:pPr lvl="0"/>
             <a:r>
-              <a:rPr lang="en-US" dirty="0"/>
-              <a:t>Click to edit Master text styles</a:t>
+              <a:rPr kumimoji="1" lang="ja-JP" altLang="en-US"/>
+              <a:t>マスター テキストの書式設定</a:t>
             </a:r>
           </a:p>
           <a:p>
             <a:pPr lvl="1"/>
             <a:r>
-              <a:rPr lang="en-US" dirty="0"/>
-              <a:t>Second level</a:t>
+              <a:rPr kumimoji="1" lang="ja-JP" altLang="en-US"/>
+              <a:t>第 </a:t>
+            </a:r>
+            <a:r>
+              <a:rPr kumimoji="1" lang="en-US" altLang="ja-JP"/>
+              <a:t>2 </a:t>
+            </a:r>
+            <a:r>
+              <a:rPr kumimoji="1" lang="ja-JP" altLang="en-US"/>
+              <a:t>レベル</a:t>
             </a:r>
           </a:p>
           <a:p>
             <a:pPr lvl="2"/>
             <a:r>
-              <a:rPr lang="en-US" dirty="0"/>
-              <a:t>Third level</a:t>
+              <a:rPr kumimoji="1" lang="ja-JP" altLang="en-US"/>
+              <a:t>第 </a:t>
+            </a:r>
+            <a:r>
+              <a:rPr kumimoji="1" lang="en-US" altLang="ja-JP"/>
+              <a:t>3 </a:t>
+            </a:r>
+            <a:r>
+              <a:rPr kumimoji="1" lang="ja-JP" altLang="en-US"/>
+              <a:t>レベル</a:t>
             </a:r>
           </a:p>
           <a:p>
             <a:pPr lvl="3"/>
             <a:r>
-              <a:rPr lang="en-US" dirty="0"/>
-              <a:t>Fourth level</a:t>
+              <a:rPr kumimoji="1" lang="ja-JP" altLang="en-US"/>
+              <a:t>第 </a:t>
+            </a:r>
+            <a:r>
+              <a:rPr kumimoji="1" lang="en-US" altLang="ja-JP"/>
+              <a:t>4 </a:t>
+            </a:r>
+            <a:r>
+              <a:rPr kumimoji="1" lang="ja-JP" altLang="en-US"/>
+              <a:t>レベル</a:t>
             </a:r>
           </a:p>
           <a:p>
             <a:pPr lvl="4"/>
             <a:r>
-              <a:rPr lang="en-US" dirty="0"/>
-              <a:t>Fifth level</a:t>
-            </a:r>
-          </a:p>
-        </p:txBody>
-      </p:sp>
-      <p:sp>
-        <p:nvSpPr>
-          <p:cNvPr id="4" name="Date Placeholder 3">
-            <a:extLst>
-              <a:ext uri="{FF2B5EF4-FFF2-40B4-BE49-F238E27FC236}">
-                <a16:creationId xmlns:a16="http://schemas.microsoft.com/office/drawing/2014/main" id="{0D63DA15-1EAB-4524-9BB7-8A7DA82A20AD}"/>
+              <a:rPr kumimoji="1" lang="ja-JP" altLang="en-US"/>
+              <a:t>第 </a:t>
+            </a:r>
+            <a:r>
+              <a:rPr kumimoji="1" lang="en-US" altLang="ja-JP"/>
+              <a:t>5 </a:t>
+            </a:r>
+            <a:r>
+              <a:rPr kumimoji="1" lang="ja-JP" altLang="en-US"/>
+              <a:t>レベル</a:t>
+            </a:r>
+          </a:p>
+        </p:txBody>
+      </p:sp>
+      <p:sp>
+        <p:nvSpPr>
+          <p:cNvPr id="4" name="日付プレースホルダー 3">
+            <a:extLst>
+              <a:ext uri="{FF2B5EF4-FFF2-40B4-BE49-F238E27FC236}">
+                <a16:creationId xmlns:a16="http://schemas.microsoft.com/office/drawing/2014/main" id="{6A56FAEE-08DB-23CD-0F4B-5FDCA33F2AE4}"/>
               </a:ext>
             </a:extLst>
           </p:cNvPr>
@@ -897,8 +976,8 @@
           <a:bodyPr/>
           <a:lstStyle/>
           <a:p>
-            <a:fld id="{D3BCAA53-8FBA-45E2-8B10-F7DD55E4E759}" type="datetimeFigureOut">
-              <a:rPr lang="en-US" dirty="0"/>
+            <a:fld id="{149C728D-416F-40D5-8F13-55E5DD1CE8D1}" type="datetimeFigureOut">
+              <a:rPr lang="en-US" smtClean="0"/>
               <a:t>6/29/25</a:t>
             </a:fld>
             <a:endParaRPr lang="en-US" dirty="0"/>
@@ -907,10 +986,10 @@
       </p:sp>
       <p:sp>
         <p:nvSpPr>
-          <p:cNvPr id="5" name="Footer Placeholder 4">
-            <a:extLst>
-              <a:ext uri="{FF2B5EF4-FFF2-40B4-BE49-F238E27FC236}">
-                <a16:creationId xmlns:a16="http://schemas.microsoft.com/office/drawing/2014/main" id="{A1EB93B9-7818-489D-AFFB-B6EAD27FF15D}"/>
+          <p:cNvPr id="5" name="フッター プレースホルダー 4">
+            <a:extLst>
+              <a:ext uri="{FF2B5EF4-FFF2-40B4-BE49-F238E27FC236}">
+                <a16:creationId xmlns:a16="http://schemas.microsoft.com/office/drawing/2014/main" id="{E4ECF51A-65E9-560E-09F3-5ED34D25A07A}"/>
               </a:ext>
             </a:extLst>
           </p:cNvPr>
@@ -927,19 +1006,20 @@
           <a:lstStyle/>
           <a:p>
             <a:r>
-              <a:rPr lang="en-US" dirty="0"/>
+              <a:rPr lang="en-US"/>
               <a:t>
               </a:t>
             </a:r>
-          </a:p>
-        </p:txBody>
-      </p:sp>
-      <p:sp>
-        <p:nvSpPr>
-          <p:cNvPr id="6" name="Slide Number Placeholder 5">
-            <a:extLst>
-              <a:ext uri="{FF2B5EF4-FFF2-40B4-BE49-F238E27FC236}">
-                <a16:creationId xmlns:a16="http://schemas.microsoft.com/office/drawing/2014/main" id="{C4528D36-894E-4FCB-B8BB-84DE89949B23}"/>
+            <a:endParaRPr lang="en-US" dirty="0"/>
+          </a:p>
+        </p:txBody>
+      </p:sp>
+      <p:sp>
+        <p:nvSpPr>
+          <p:cNvPr id="6" name="スライド番号プレースホルダー 5">
+            <a:extLst>
+              <a:ext uri="{FF2B5EF4-FFF2-40B4-BE49-F238E27FC236}">
+                <a16:creationId xmlns:a16="http://schemas.microsoft.com/office/drawing/2014/main" id="{1E3071D2-A900-E06B-56C8-B9F23BE8488E}"/>
               </a:ext>
             </a:extLst>
           </p:cNvPr>
@@ -956,7 +1036,7 @@
           <a:lstStyle/>
           <a:p>
             <a:fld id="{017DE1FC-E54A-4B87-A814-263D1E8654B2}" type="slidenum">
-              <a:rPr lang="en-US" dirty="0"/>
+              <a:rPr lang="en-US" smtClean="0"/>
               <a:t>‹#›</a:t>
             </a:fld>
             <a:endParaRPr lang="en-US" dirty="0"/>
@@ -966,19 +1046,20 @@
     </p:spTree>
     <p:extLst>
       <p:ext uri="{BB962C8B-B14F-4D97-AF65-F5344CB8AC3E}">
-        <p14:creationId xmlns:p14="http://schemas.microsoft.com/office/powerpoint/2010/main" val="3956857744"/>
+        <p14:creationId xmlns:p14="http://schemas.microsoft.com/office/powerpoint/2010/main" val="918331155"/>
       </p:ext>
     </p:extLst>
   </p:cSld>
   <p:clrMapOvr>
     <a:masterClrMapping/>
   </p:clrMapOvr>
+  <p:hf hdr="0"/>
 </p:sldLayout>
 </file>
 
 <file path=ppt/slideLayouts/slideLayout3.xml><?xml version="1.0" encoding="utf-8"?>
 <p:sldLayout xmlns:a="http://schemas.openxmlformats.org/drawingml/2006/main" xmlns:r="http://schemas.openxmlformats.org/officeDocument/2006/relationships" xmlns:p="http://schemas.openxmlformats.org/presentationml/2006/main" type="secHead" preserve="1">
-  <p:cSld name="Section Header">
+  <p:cSld name="セクション見出し">
     <p:spTree>
       <p:nvGrpSpPr>
         <p:cNvPr id="1" name=""/>
@@ -995,10 +1076,10 @@
       </p:grpSpPr>
       <p:sp>
         <p:nvSpPr>
-          <p:cNvPr id="2" name="Title 1">
-            <a:extLst>
-              <a:ext uri="{FF2B5EF4-FFF2-40B4-BE49-F238E27FC236}">
-                <a16:creationId xmlns:a16="http://schemas.microsoft.com/office/drawing/2014/main" id="{626964F1-5687-421F-B3DF-BA3C8DADC0E6}"/>
+          <p:cNvPr id="2" name="タイトル 1">
+            <a:extLst>
+              <a:ext uri="{FF2B5EF4-FFF2-40B4-BE49-F238E27FC236}">
+                <a16:creationId xmlns:a16="http://schemas.microsoft.com/office/drawing/2014/main" id="{25C31E0C-5AB1-82FE-C4B4-0037BD273013}"/>
               </a:ext>
             </a:extLst>
           </p:cNvPr>
@@ -1011,33 +1092,31 @@
         </p:nvSpPr>
         <p:spPr>
           <a:xfrm>
-            <a:off x="1380930" y="1709738"/>
-            <a:ext cx="9966519" cy="2852737"/>
+            <a:off x="831850" y="1709738"/>
+            <a:ext cx="10515600" cy="2852737"/>
           </a:xfrm>
         </p:spPr>
         <p:txBody>
-          <a:bodyPr anchor="b">
-            <a:normAutofit/>
-          </a:bodyPr>
+          <a:bodyPr anchor="b"/>
           <a:lstStyle>
             <a:lvl1pPr>
-              <a:defRPr sz="4400" spc="750" baseline="0"/>
+              <a:defRPr sz="6000"/>
             </a:lvl1pPr>
           </a:lstStyle>
           <a:p>
             <a:r>
-              <a:rPr lang="en-US" dirty="0"/>
-              <a:t>Click to edit Master title style</a:t>
-            </a:r>
-          </a:p>
-        </p:txBody>
-      </p:sp>
-      <p:sp>
-        <p:nvSpPr>
-          <p:cNvPr id="3" name="Text Placeholder 2">
-            <a:extLst>
-              <a:ext uri="{FF2B5EF4-FFF2-40B4-BE49-F238E27FC236}">
-                <a16:creationId xmlns:a16="http://schemas.microsoft.com/office/drawing/2014/main" id="{1DDBB876-5FD9-4964-BD37-6F05DAEBE325}"/>
+              <a:rPr kumimoji="1" lang="ja-JP" altLang="en-US"/>
+              <a:t>マスター タイトルの書式設定</a:t>
+            </a:r>
+          </a:p>
+        </p:txBody>
+      </p:sp>
+      <p:sp>
+        <p:nvSpPr>
+          <p:cNvPr id="3" name="テキスト プレースホルダー 2">
+            <a:extLst>
+              <a:ext uri="{FF2B5EF4-FFF2-40B4-BE49-F238E27FC236}">
+                <a16:creationId xmlns:a16="http://schemas.microsoft.com/office/drawing/2014/main" id="{63EBAD68-7972-B2C5-0CF8-70E2984640D1}"/>
               </a:ext>
             </a:extLst>
           </p:cNvPr>
@@ -1050,101 +1129,99 @@
         </p:nvSpPr>
         <p:spPr>
           <a:xfrm>
-            <a:off x="1380930" y="4976327"/>
-            <a:ext cx="9966520" cy="1113323"/>
+            <a:off x="831850" y="4589463"/>
+            <a:ext cx="10515600" cy="1500187"/>
           </a:xfrm>
         </p:spPr>
         <p:txBody>
-          <a:bodyPr>
-            <a:normAutofit/>
-          </a:bodyPr>
+          <a:bodyPr/>
           <a:lstStyle>
             <a:lvl1pPr marL="0" indent="0">
               <a:buNone/>
-              <a:defRPr sz="1200" spc="600">
+              <a:defRPr sz="2400">
                 <a:solidFill>
                   <a:schemeClr val="tx1">
-                    <a:tint val="75000"/>
+                    <a:tint val="82000"/>
                   </a:schemeClr>
                 </a:solidFill>
               </a:defRPr>
             </a:lvl1pPr>
             <a:lvl2pPr marL="457200" indent="0">
               <a:buNone/>
-              <a:defRPr sz="1200">
+              <a:defRPr sz="2000">
                 <a:solidFill>
                   <a:schemeClr val="tx1">
-                    <a:tint val="75000"/>
+                    <a:tint val="82000"/>
                   </a:schemeClr>
                 </a:solidFill>
               </a:defRPr>
             </a:lvl2pPr>
             <a:lvl3pPr marL="914400" indent="0">
               <a:buNone/>
-              <a:defRPr sz="1200">
+              <a:defRPr sz="1800">
                 <a:solidFill>
                   <a:schemeClr val="tx1">
-                    <a:tint val="75000"/>
+                    <a:tint val="82000"/>
                   </a:schemeClr>
                 </a:solidFill>
               </a:defRPr>
             </a:lvl3pPr>
             <a:lvl4pPr marL="1371600" indent="0">
               <a:buNone/>
-              <a:defRPr sz="1200">
+              <a:defRPr sz="1600">
                 <a:solidFill>
                   <a:schemeClr val="tx1">
-                    <a:tint val="75000"/>
+                    <a:tint val="82000"/>
                   </a:schemeClr>
                 </a:solidFill>
               </a:defRPr>
             </a:lvl4pPr>
             <a:lvl5pPr marL="1828800" indent="0">
               <a:buNone/>
-              <a:defRPr sz="1200">
+              <a:defRPr sz="1600">
                 <a:solidFill>
                   <a:schemeClr val="tx1">
-                    <a:tint val="75000"/>
+                    <a:tint val="82000"/>
                   </a:schemeClr>
                 </a:solidFill>
               </a:defRPr>
             </a:lvl5pPr>
             <a:lvl6pPr marL="2286000" indent="0">
               <a:buNone/>
-              <a:defRPr sz="1200">
+              <a:defRPr sz="1600">
                 <a:solidFill>
                   <a:schemeClr val="tx1">
-                    <a:tint val="75000"/>
+                    <a:tint val="82000"/>
                   </a:schemeClr>
                 </a:solidFill>
               </a:defRPr>
             </a:lvl6pPr>
             <a:lvl7pPr marL="2743200" indent="0">
               <a:buNone/>
-              <a:defRPr sz="1200">
+              <a:defRPr sz="1600">
                 <a:solidFill>
                   <a:schemeClr val="tx1">
-                    <a:tint val="75000"/>
+                    <a:tint val="82000"/>
                   </a:schemeClr>
                 </a:solidFill>
               </a:defRPr>
             </a:lvl7pPr>
             <a:lvl8pPr marL="3200400" indent="0">
               <a:buNone/>
-              <a:defRPr sz="1200">
+              <a:defRPr sz="1600">
                 <a:solidFill>
                   <a:schemeClr val="tx1">
-                    <a:tint val="75000"/>
+                    <a:tint val="82000"/>
                   </a:schemeClr>
                 </a:solidFill>
               </a:defRPr>
             </a:lvl8pPr>
             <a:lvl9pPr marL="3657600" indent="0">
               <a:buNone/>
-              <a:defRPr sz="1200">
+              <a:defRPr sz="1600">
                 <a:solidFill>
                   <a:schemeClr val="tx1">
-                    <a:tint val="75000"/>
+                    <a:tint val="82000"/>
                   </a:schemeClr>
                 </a:solidFill>
               </a:defRPr>
@@ -1153,18 +1230,18 @@
           <a:p>
             <a:pPr lvl="0"/>
             <a:r>
-              <a:rPr lang="en-US" dirty="0"/>
-              <a:t>CLICK TO EDIT MASTER TEXT STYLES</a:t>
-            </a:r>
-          </a:p>
-        </p:txBody>
-      </p:sp>
-      <p:sp>
-        <p:nvSpPr>
-          <p:cNvPr id="4" name="Date Placeholder 3">
-            <a:extLst>
-              <a:ext uri="{FF2B5EF4-FFF2-40B4-BE49-F238E27FC236}">
-                <a16:creationId xmlns:a16="http://schemas.microsoft.com/office/drawing/2014/main" id="{875EA80A-FCDD-4009-9A1F-8B54817869DC}"/>
+              <a:rPr kumimoji="1" lang="ja-JP" altLang="en-US"/>
+              <a:t>マスター テキストの書式設定</a:t>
+            </a:r>
+          </a:p>
+        </p:txBody>
+      </p:sp>
+      <p:sp>
+        <p:nvSpPr>
+          <p:cNvPr id="4" name="日付プレースホルダー 3">
+            <a:extLst>
+              <a:ext uri="{FF2B5EF4-FFF2-40B4-BE49-F238E27FC236}">
+                <a16:creationId xmlns:a16="http://schemas.microsoft.com/office/drawing/2014/main" id="{608EAA4A-74A9-214C-C295-153A37C962B3}"/>
               </a:ext>
             </a:extLst>
           </p:cNvPr>
@@ -1180,8 +1257,8 @@
           <a:bodyPr/>
           <a:lstStyle/>
           <a:p>
-            <a:fld id="{2F8C84CF-6F0D-4195-920D-9D6F75893720}" type="datetimeFigureOut">
-              <a:rPr lang="en-US" dirty="0"/>
+            <a:fld id="{149C728D-416F-40D5-8F13-55E5DD1CE8D1}" type="datetimeFigureOut">
+              <a:rPr lang="en-US" smtClean="0"/>
               <a:t>6/29/25</a:t>
             </a:fld>
             <a:endParaRPr lang="en-US" dirty="0"/>
@@ -1190,10 +1267,10 @@
       </p:sp>
       <p:sp>
         <p:nvSpPr>
-          <p:cNvPr id="5" name="Footer Placeholder 4">
-            <a:extLst>
-              <a:ext uri="{FF2B5EF4-FFF2-40B4-BE49-F238E27FC236}">
-                <a16:creationId xmlns:a16="http://schemas.microsoft.com/office/drawing/2014/main" id="{EA4A3422-56D9-4942-BC63-831AED91F16D}"/>
+          <p:cNvPr id="5" name="フッター プレースホルダー 4">
+            <a:extLst>
+              <a:ext uri="{FF2B5EF4-FFF2-40B4-BE49-F238E27FC236}">
+                <a16:creationId xmlns:a16="http://schemas.microsoft.com/office/drawing/2014/main" id="{0A1913E5-BCD0-D1DF-60B3-0EAD1A0D596C}"/>
               </a:ext>
             </a:extLst>
           </p:cNvPr>
@@ -1210,19 +1287,20 @@
           <a:lstStyle/>
           <a:p>
             <a:r>
-              <a:rPr lang="en-US" dirty="0"/>
+              <a:rPr lang="en-US"/>
               <a:t>
               </a:t>
             </a:r>
-          </a:p>
-        </p:txBody>
-      </p:sp>
-      <p:sp>
-        <p:nvSpPr>
-          <p:cNvPr id="6" name="Slide Number Placeholder 5">
-            <a:extLst>
-              <a:ext uri="{FF2B5EF4-FFF2-40B4-BE49-F238E27FC236}">
-                <a16:creationId xmlns:a16="http://schemas.microsoft.com/office/drawing/2014/main" id="{D5D4B42A-AC2C-4FD8-AD0D-BECDD3846D3A}"/>
+            <a:endParaRPr lang="en-US" dirty="0"/>
+          </a:p>
+        </p:txBody>
+      </p:sp>
+      <p:sp>
+        <p:nvSpPr>
+          <p:cNvPr id="6" name="スライド番号プレースホルダー 5">
+            <a:extLst>
+              <a:ext uri="{FF2B5EF4-FFF2-40B4-BE49-F238E27FC236}">
+                <a16:creationId xmlns:a16="http://schemas.microsoft.com/office/drawing/2014/main" id="{66DB5712-2F78-CE59-386D-DB864972858B}"/>
               </a:ext>
             </a:extLst>
           </p:cNvPr>
@@ -1239,7 +1317,7 @@
           <a:lstStyle/>
           <a:p>
             <a:fld id="{017DE1FC-E54A-4B87-A814-263D1E8654B2}" type="slidenum">
-              <a:rPr lang="en-US" dirty="0"/>
+              <a:rPr lang="en-US" smtClean="0"/>
               <a:t>‹#›</a:t>
             </a:fld>
             <a:endParaRPr lang="en-US" dirty="0"/>
@@ -1249,19 +1327,20 @@
     </p:spTree>
     <p:extLst>
       <p:ext uri="{BB962C8B-B14F-4D97-AF65-F5344CB8AC3E}">
-        <p14:creationId xmlns:p14="http://schemas.microsoft.com/office/powerpoint/2010/main" val="4046902295"/>
+        <p14:creationId xmlns:p14="http://schemas.microsoft.com/office/powerpoint/2010/main" val="3523886855"/>
       </p:ext>
     </p:extLst>
   </p:cSld>
   <p:clrMapOvr>
     <a:masterClrMapping/>
   </p:clrMapOvr>
+  <p:hf hdr="0"/>
 </p:sldLayout>
 </file>
 
 <file path=ppt/slideLayouts/slideLayout4.xml><?xml version="1.0" encoding="utf-8"?>
 <p:sldLayout xmlns:a="http://schemas.openxmlformats.org/drawingml/2006/main" xmlns:r="http://schemas.openxmlformats.org/officeDocument/2006/relationships" xmlns:p="http://schemas.openxmlformats.org/presentationml/2006/main" type="twoObj" preserve="1">
-  <p:cSld name="Two Content">
+  <p:cSld name="2 つのコンテンツ">
     <p:spTree>
       <p:nvGrpSpPr>
         <p:cNvPr id="1" name=""/>
@@ -1278,10 +1357,10 @@
       </p:grpSpPr>
       <p:sp>
         <p:nvSpPr>
-          <p:cNvPr id="2" name="Title 1">
-            <a:extLst>
-              <a:ext uri="{FF2B5EF4-FFF2-40B4-BE49-F238E27FC236}">
-                <a16:creationId xmlns:a16="http://schemas.microsoft.com/office/drawing/2014/main" id="{29FFDAF1-8359-4A0F-91B3-03E77C670543}"/>
+          <p:cNvPr id="2" name="タイトル 1">
+            <a:extLst>
+              <a:ext uri="{FF2B5EF4-FFF2-40B4-BE49-F238E27FC236}">
+                <a16:creationId xmlns:a16="http://schemas.microsoft.com/office/drawing/2014/main" id="{75DEC94F-FF3D-03F5-E988-1F5C73D0C25C}"/>
               </a:ext>
             </a:extLst>
           </p:cNvPr>
@@ -1292,35 +1371,24 @@
             <p:ph type="title"/>
           </p:nvPr>
         </p:nvSpPr>
-        <p:spPr>
-          <a:xfrm>
-            <a:off x="1044054" y="457200"/>
-            <a:ext cx="10309745" cy="1233488"/>
-          </a:xfrm>
-        </p:spPr>
-        <p:txBody>
-          <a:bodyPr>
-            <a:normAutofit/>
-          </a:bodyPr>
-          <a:lstStyle>
-            <a:lvl1pPr>
-              <a:defRPr sz="3200"/>
-            </a:lvl1pPr>
-          </a:lstStyle>
-          <a:p>
-            <a:r>
-              <a:rPr lang="en-US" dirty="0"/>
-              <a:t>Click to edit Master title style</a:t>
-            </a:r>
-          </a:p>
-        </p:txBody>
-      </p:sp>
-      <p:sp>
-        <p:nvSpPr>
-          <p:cNvPr id="3" name="Content Placeholder 2">
-            <a:extLst>
-              <a:ext uri="{FF2B5EF4-FFF2-40B4-BE49-F238E27FC236}">
-                <a16:creationId xmlns:a16="http://schemas.microsoft.com/office/drawing/2014/main" id="{4921E3D3-6B33-4CA0-B06B-A8BB05CAB3C4}"/>
+        <p:spPr/>
+        <p:txBody>
+          <a:bodyPr/>
+          <a:lstStyle/>
+          <a:p>
+            <a:r>
+              <a:rPr kumimoji="1" lang="ja-JP" altLang="en-US"/>
+              <a:t>マスター タイトルの書式設定</a:t>
+            </a:r>
+          </a:p>
+        </p:txBody>
+      </p:sp>
+      <p:sp>
+        <p:nvSpPr>
+          <p:cNvPr id="3" name="コンテンツ プレースホルダー 2">
+            <a:extLst>
+              <a:ext uri="{FF2B5EF4-FFF2-40B4-BE49-F238E27FC236}">
+                <a16:creationId xmlns:a16="http://schemas.microsoft.com/office/drawing/2014/main" id="{BBBB4B81-1D83-3119-F3C2-85594C92C9F4}"/>
               </a:ext>
             </a:extLst>
           </p:cNvPr>
@@ -1333,8 +1401,8 @@
         </p:nvSpPr>
         <p:spPr>
           <a:xfrm>
-            <a:off x="1044054" y="1996141"/>
-            <a:ext cx="4975746" cy="4180822"/>
+            <a:off x="838200" y="1825625"/>
+            <a:ext cx="5181600" cy="4351338"/>
           </a:xfrm>
         </p:spPr>
         <p:txBody>
@@ -1343,46 +1411,78 @@
           <a:p>
             <a:pPr lvl="0"/>
             <a:r>
-              <a:rPr lang="en-US" dirty="0"/>
-              <a:t>Click to edit Master text styles</a:t>
+              <a:rPr kumimoji="1" lang="ja-JP" altLang="en-US"/>
+              <a:t>マスター テキストの書式設定</a:t>
             </a:r>
           </a:p>
           <a:p>
             <a:pPr lvl="1"/>
             <a:r>
-              <a:rPr lang="en-US" dirty="0"/>
-              <a:t>Second level</a:t>
+              <a:rPr kumimoji="1" lang="ja-JP" altLang="en-US"/>
+              <a:t>第 </a:t>
+            </a:r>
+            <a:r>
+              <a:rPr kumimoji="1" lang="en-US" altLang="ja-JP"/>
+              <a:t>2 </a:t>
+            </a:r>
+            <a:r>
+              <a:rPr kumimoji="1" lang="ja-JP" altLang="en-US"/>
+              <a:t>レベル</a:t>
             </a:r>
           </a:p>
           <a:p>
             <a:pPr lvl="2"/>
             <a:r>
-              <a:rPr lang="en-US" dirty="0"/>
-              <a:t>Third level</a:t>
+              <a:rPr kumimoji="1" lang="ja-JP" altLang="en-US"/>
+              <a:t>第 </a:t>
+            </a:r>
+            <a:r>
+              <a:rPr kumimoji="1" lang="en-US" altLang="ja-JP"/>
+              <a:t>3 </a:t>
+            </a:r>
+            <a:r>
+              <a:rPr kumimoji="1" lang="ja-JP" altLang="en-US"/>
+              <a:t>レベル</a:t>
             </a:r>
           </a:p>
           <a:p>
             <a:pPr lvl="3"/>
             <a:r>
-              <a:rPr lang="en-US" dirty="0"/>
-              <a:t>Fourth level</a:t>
+              <a:rPr kumimoji="1" lang="ja-JP" altLang="en-US"/>
+              <a:t>第 </a:t>
+            </a:r>
+            <a:r>
+              <a:rPr kumimoji="1" lang="en-US" altLang="ja-JP"/>
+              <a:t>4 </a:t>
+            </a:r>
+            <a:r>
+              <a:rPr kumimoji="1" lang="ja-JP" altLang="en-US"/>
+              <a:t>レベル</a:t>
             </a:r>
           </a:p>
           <a:p>
             <a:pPr lvl="4"/>
             <a:r>
-              <a:rPr lang="en-US" dirty="0"/>
-              <a:t>Fifth level</a:t>
-            </a:r>
-          </a:p>
-        </p:txBody>
-      </p:sp>
-      <p:sp>
-        <p:nvSpPr>
-          <p:cNvPr id="4" name="Content Placeholder 3">
-            <a:extLst>
-              <a:ext uri="{FF2B5EF4-FFF2-40B4-BE49-F238E27FC236}">
-                <a16:creationId xmlns:a16="http://schemas.microsoft.com/office/drawing/2014/main" id="{A629C334-815D-47FD-A9B5-E871E28641C9}"/>
+              <a:rPr kumimoji="1" lang="ja-JP" altLang="en-US"/>
+              <a:t>第 </a:t>
+            </a:r>
+            <a:r>
+              <a:rPr kumimoji="1" lang="en-US" altLang="ja-JP"/>
+              <a:t>5 </a:t>
+            </a:r>
+            <a:r>
+              <a:rPr kumimoji="1" lang="ja-JP" altLang="en-US"/>
+              <a:t>レベル</a:t>
+            </a:r>
+          </a:p>
+        </p:txBody>
+      </p:sp>
+      <p:sp>
+        <p:nvSpPr>
+          <p:cNvPr id="4" name="コンテンツ プレースホルダー 3">
+            <a:extLst>
+              <a:ext uri="{FF2B5EF4-FFF2-40B4-BE49-F238E27FC236}">
+                <a16:creationId xmlns:a16="http://schemas.microsoft.com/office/drawing/2014/main" id="{6570CF51-3B14-0AF1-7802-DB06EA0E8F4D}"/>
               </a:ext>
             </a:extLst>
           </p:cNvPr>
@@ -1395,8 +1495,8 @@
         </p:nvSpPr>
         <p:spPr>
           <a:xfrm>
-            <a:off x="6172200" y="1996141"/>
-            <a:ext cx="5181600" cy="4180822"/>
+            <a:off x="6172200" y="1825625"/>
+            <a:ext cx="5181600" cy="4351338"/>
           </a:xfrm>
         </p:spPr>
         <p:txBody>
@@ -1405,46 +1505,78 @@
           <a:p>
             <a:pPr lvl="0"/>
             <a:r>
-              <a:rPr lang="en-US" dirty="0"/>
-              <a:t>Click to edit Master text styles</a:t>
+              <a:rPr kumimoji="1" lang="ja-JP" altLang="en-US"/>
+              <a:t>マスター テキストの書式設定</a:t>
             </a:r>
           </a:p>
           <a:p>
             <a:pPr lvl="1"/>
             <a:r>
-              <a:rPr lang="en-US" dirty="0"/>
-              <a:t>Second level</a:t>
+              <a:rPr kumimoji="1" lang="ja-JP" altLang="en-US"/>
+              <a:t>第 </a:t>
+            </a:r>
+            <a:r>
+              <a:rPr kumimoji="1" lang="en-US" altLang="ja-JP"/>
+              <a:t>2 </a:t>
+            </a:r>
+            <a:r>
+              <a:rPr kumimoji="1" lang="ja-JP" altLang="en-US"/>
+              <a:t>レベル</a:t>
             </a:r>
           </a:p>
           <a:p>
             <a:pPr lvl="2"/>
             <a:r>
-              <a:rPr lang="en-US" dirty="0"/>
-              <a:t>Third level</a:t>
+              <a:rPr kumimoji="1" lang="ja-JP" altLang="en-US"/>
+              <a:t>第 </a:t>
+            </a:r>
+            <a:r>
+              <a:rPr kumimoji="1" lang="en-US" altLang="ja-JP"/>
+              <a:t>3 </a:t>
+            </a:r>
+            <a:r>
+              <a:rPr kumimoji="1" lang="ja-JP" altLang="en-US"/>
+              <a:t>レベル</a:t>
             </a:r>
           </a:p>
           <a:p>
             <a:pPr lvl="3"/>
             <a:r>
-              <a:rPr lang="en-US" dirty="0"/>
-              <a:t>Fourth level</a:t>
+              <a:rPr kumimoji="1" lang="ja-JP" altLang="en-US"/>
+              <a:t>第 </a:t>
+            </a:r>
+            <a:r>
+              <a:rPr kumimoji="1" lang="en-US" altLang="ja-JP"/>
+              <a:t>4 </a:t>
+            </a:r>
+            <a:r>
+              <a:rPr kumimoji="1" lang="ja-JP" altLang="en-US"/>
+              <a:t>レベル</a:t>
             </a:r>
           </a:p>
           <a:p>
             <a:pPr lvl="4"/>
             <a:r>
-              <a:rPr lang="en-US" dirty="0"/>
-              <a:t>Fifth level</a:t>
-            </a:r>
-          </a:p>
-        </p:txBody>
-      </p:sp>
-      <p:sp>
-        <p:nvSpPr>
-          <p:cNvPr id="5" name="Date Placeholder 4">
-            <a:extLst>
-              <a:ext uri="{FF2B5EF4-FFF2-40B4-BE49-F238E27FC236}">
-                <a16:creationId xmlns:a16="http://schemas.microsoft.com/office/drawing/2014/main" id="{797975F2-7A90-4820-B90F-D28E31A35EB8}"/>
+              <a:rPr kumimoji="1" lang="ja-JP" altLang="en-US"/>
+              <a:t>第 </a:t>
+            </a:r>
+            <a:r>
+              <a:rPr kumimoji="1" lang="en-US" altLang="ja-JP"/>
+              <a:t>5 </a:t>
+            </a:r>
+            <a:r>
+              <a:rPr kumimoji="1" lang="ja-JP" altLang="en-US"/>
+              <a:t>レベル</a:t>
+            </a:r>
+          </a:p>
+        </p:txBody>
+      </p:sp>
+      <p:sp>
+        <p:nvSpPr>
+          <p:cNvPr id="5" name="日付プレースホルダー 4">
+            <a:extLst>
+              <a:ext uri="{FF2B5EF4-FFF2-40B4-BE49-F238E27FC236}">
+                <a16:creationId xmlns:a16="http://schemas.microsoft.com/office/drawing/2014/main" id="{F56E0BEA-EF37-27D8-0820-BDC0316F760C}"/>
               </a:ext>
             </a:extLst>
           </p:cNvPr>
@@ -1460,8 +1592,8 @@
           <a:bodyPr/>
           <a:lstStyle/>
           <a:p>
-            <a:fld id="{121B3BBE-A1CF-4CC7-B02C-EBCBBE110242}" type="datetimeFigureOut">
-              <a:rPr lang="en-US" dirty="0"/>
+            <a:fld id="{149C728D-416F-40D5-8F13-55E5DD1CE8D1}" type="datetimeFigureOut">
+              <a:rPr lang="en-US" smtClean="0"/>
               <a:t>6/29/25</a:t>
             </a:fld>
             <a:endParaRPr lang="en-US" dirty="0"/>
@@ -1470,10 +1602,10 @@
       </p:sp>
       <p:sp>
         <p:nvSpPr>
-          <p:cNvPr id="6" name="Footer Placeholder 5">
-            <a:extLst>
-              <a:ext uri="{FF2B5EF4-FFF2-40B4-BE49-F238E27FC236}">
-                <a16:creationId xmlns:a16="http://schemas.microsoft.com/office/drawing/2014/main" id="{823CFAD5-8AF8-4610-8324-85AA062E2712}"/>
+          <p:cNvPr id="6" name="フッター プレースホルダー 5">
+            <a:extLst>
+              <a:ext uri="{FF2B5EF4-FFF2-40B4-BE49-F238E27FC236}">
+                <a16:creationId xmlns:a16="http://schemas.microsoft.com/office/drawing/2014/main" id="{9B8DEA2D-7198-8D29-4DED-0AE190507420}"/>
               </a:ext>
             </a:extLst>
           </p:cNvPr>
@@ -1490,19 +1622,20 @@
           <a:lstStyle/>
           <a:p>
             <a:r>
-              <a:rPr lang="en-US" dirty="0"/>
+              <a:rPr lang="en-US"/>
               <a:t>
               </a:t>
             </a:r>
-          </a:p>
-        </p:txBody>
-      </p:sp>
-      <p:sp>
-        <p:nvSpPr>
-          <p:cNvPr id="7" name="Slide Number Placeholder 6">
-            <a:extLst>
-              <a:ext uri="{FF2B5EF4-FFF2-40B4-BE49-F238E27FC236}">
-                <a16:creationId xmlns:a16="http://schemas.microsoft.com/office/drawing/2014/main" id="{16808CC8-C46E-4A10-8A83-7A251067EA68}"/>
+            <a:endParaRPr lang="en-US" dirty="0"/>
+          </a:p>
+        </p:txBody>
+      </p:sp>
+      <p:sp>
+        <p:nvSpPr>
+          <p:cNvPr id="7" name="スライド番号プレースホルダー 6">
+            <a:extLst>
+              <a:ext uri="{FF2B5EF4-FFF2-40B4-BE49-F238E27FC236}">
+                <a16:creationId xmlns:a16="http://schemas.microsoft.com/office/drawing/2014/main" id="{E998AF14-0A07-39A0-12A4-E6293BC19ECE}"/>
               </a:ext>
             </a:extLst>
           </p:cNvPr>
@@ -1519,7 +1652,7 @@
           <a:lstStyle/>
           <a:p>
             <a:fld id="{017DE1FC-E54A-4B87-A814-263D1E8654B2}" type="slidenum">
-              <a:rPr lang="en-US" dirty="0"/>
+              <a:rPr lang="en-US" smtClean="0"/>
               <a:t>‹#›</a:t>
             </a:fld>
             <a:endParaRPr lang="en-US" dirty="0"/>
@@ -1529,19 +1662,20 @@
     </p:spTree>
     <p:extLst>
       <p:ext uri="{BB962C8B-B14F-4D97-AF65-F5344CB8AC3E}">
-        <p14:creationId xmlns:p14="http://schemas.microsoft.com/office/powerpoint/2010/main" val="3759268476"/>
+        <p14:creationId xmlns:p14="http://schemas.microsoft.com/office/powerpoint/2010/main" val="2024922797"/>
       </p:ext>
     </p:extLst>
   </p:cSld>
   <p:clrMapOvr>
     <a:masterClrMapping/>
   </p:clrMapOvr>
+  <p:hf hdr="0"/>
 </p:sldLayout>
 </file>
 
 <file path=ppt/slideLayouts/slideLayout5.xml><?xml version="1.0" encoding="utf-8"?>
 <p:sldLayout xmlns:a="http://schemas.openxmlformats.org/drawingml/2006/main" xmlns:r="http://schemas.openxmlformats.org/officeDocument/2006/relationships" xmlns:p="http://schemas.openxmlformats.org/presentationml/2006/main" type="twoTxTwoObj" preserve="1">
-  <p:cSld name="Comparison">
+  <p:cSld name="比較">
     <p:spTree>
       <p:nvGrpSpPr>
         <p:cNvPr id="1" name=""/>
@@ -1558,10 +1692,10 @@
       </p:grpSpPr>
       <p:sp>
         <p:nvSpPr>
-          <p:cNvPr id="2" name="Title 1">
-            <a:extLst>
-              <a:ext uri="{FF2B5EF4-FFF2-40B4-BE49-F238E27FC236}">
-                <a16:creationId xmlns:a16="http://schemas.microsoft.com/office/drawing/2014/main" id="{584E82B8-F9D9-4F53-A4A6-F12EB5F12846}"/>
+          <p:cNvPr id="2" name="タイトル 1">
+            <a:extLst>
+              <a:ext uri="{FF2B5EF4-FFF2-40B4-BE49-F238E27FC236}">
+                <a16:creationId xmlns:a16="http://schemas.microsoft.com/office/drawing/2014/main" id="{44832E06-454D-8F72-2588-605DC254444A}"/>
               </a:ext>
             </a:extLst>
           </p:cNvPr>
@@ -1574,33 +1708,27 @@
         </p:nvSpPr>
         <p:spPr>
           <a:xfrm>
-            <a:off x="1368490" y="457200"/>
-            <a:ext cx="9986898" cy="1233488"/>
+            <a:off x="839788" y="365125"/>
+            <a:ext cx="10515600" cy="1325563"/>
           </a:xfrm>
         </p:spPr>
         <p:txBody>
-          <a:bodyPr>
-            <a:normAutofit/>
-          </a:bodyPr>
-          <a:lstStyle>
-            <a:lvl1pPr>
-              <a:defRPr sz="2800"/>
-            </a:lvl1pPr>
-          </a:lstStyle>
-          <a:p>
-            <a:r>
-              <a:rPr lang="en-US" dirty="0"/>
-              <a:t>Click to edit Master title style</a:t>
-            </a:r>
-          </a:p>
-        </p:txBody>
-      </p:sp>
-      <p:sp>
-        <p:nvSpPr>
-          <p:cNvPr id="3" name="Text Placeholder 2">
-            <a:extLst>
-              <a:ext uri="{FF2B5EF4-FFF2-40B4-BE49-F238E27FC236}">
-                <a16:creationId xmlns:a16="http://schemas.microsoft.com/office/drawing/2014/main" id="{C1F070CA-85E9-47C7-8564-FFA1AE34B9E5}"/>
+          <a:bodyPr/>
+          <a:lstStyle/>
+          <a:p>
+            <a:r>
+              <a:rPr kumimoji="1" lang="ja-JP" altLang="en-US"/>
+              <a:t>マスター タイトルの書式設定</a:t>
+            </a:r>
+          </a:p>
+        </p:txBody>
+      </p:sp>
+      <p:sp>
+        <p:nvSpPr>
+          <p:cNvPr id="3" name="テキスト プレースホルダー 2">
+            <a:extLst>
+              <a:ext uri="{FF2B5EF4-FFF2-40B4-BE49-F238E27FC236}">
+                <a16:creationId xmlns:a16="http://schemas.microsoft.com/office/drawing/2014/main" id="{508BAE7A-DDC6-D493-BA06-1346172ED09F}"/>
               </a:ext>
             </a:extLst>
           </p:cNvPr>
@@ -1613,8 +1741,8 @@
         </p:nvSpPr>
         <p:spPr>
           <a:xfrm>
-            <a:off x="1368490" y="1681163"/>
-            <a:ext cx="4629085" cy="823912"/>
+            <a:off x="839788" y="1681163"/>
+            <a:ext cx="5157787" cy="823912"/>
           </a:xfrm>
         </p:spPr>
         <p:txBody>
@@ -1660,18 +1788,18 @@
           <a:p>
             <a:pPr lvl="0"/>
             <a:r>
-              <a:rPr lang="en-US" dirty="0"/>
-              <a:t>Click to edit Master text styles</a:t>
-            </a:r>
-          </a:p>
-        </p:txBody>
-      </p:sp>
-      <p:sp>
-        <p:nvSpPr>
-          <p:cNvPr id="4" name="Content Placeholder 3">
-            <a:extLst>
-              <a:ext uri="{FF2B5EF4-FFF2-40B4-BE49-F238E27FC236}">
-                <a16:creationId xmlns:a16="http://schemas.microsoft.com/office/drawing/2014/main" id="{9938D4B1-41B3-4BF5-9076-A16984A81FF1}"/>
+              <a:rPr kumimoji="1" lang="ja-JP" altLang="en-US"/>
+              <a:t>マスター テキストの書式設定</a:t>
+            </a:r>
+          </a:p>
+        </p:txBody>
+      </p:sp>
+      <p:sp>
+        <p:nvSpPr>
+          <p:cNvPr id="4" name="コンテンツ プレースホルダー 3">
+            <a:extLst>
+              <a:ext uri="{FF2B5EF4-FFF2-40B4-BE49-F238E27FC236}">
+                <a16:creationId xmlns:a16="http://schemas.microsoft.com/office/drawing/2014/main" id="{BD055BE1-FFDD-900E-44C6-5E5448C03175}"/>
               </a:ext>
             </a:extLst>
           </p:cNvPr>
@@ -1684,8 +1812,8 @@
         </p:nvSpPr>
         <p:spPr>
           <a:xfrm>
-            <a:off x="1368490" y="2505075"/>
-            <a:ext cx="4629085" cy="3684588"/>
+            <a:off x="839788" y="2505075"/>
+            <a:ext cx="5157787" cy="3684588"/>
           </a:xfrm>
         </p:spPr>
         <p:txBody>
@@ -1694,46 +1822,78 @@
           <a:p>
             <a:pPr lvl="0"/>
             <a:r>
-              <a:rPr lang="en-US" dirty="0"/>
-              <a:t>Click to edit Master text styles</a:t>
+              <a:rPr kumimoji="1" lang="ja-JP" altLang="en-US"/>
+              <a:t>マスター テキストの書式設定</a:t>
             </a:r>
           </a:p>
           <a:p>
             <a:pPr lvl="1"/>
             <a:r>
-              <a:rPr lang="en-US" dirty="0"/>
-              <a:t>Second level</a:t>
+              <a:rPr kumimoji="1" lang="ja-JP" altLang="en-US"/>
+              <a:t>第 </a:t>
+            </a:r>
+            <a:r>
+              <a:rPr kumimoji="1" lang="en-US" altLang="ja-JP"/>
+              <a:t>2 </a:t>
+            </a:r>
+            <a:r>
+              <a:rPr kumimoji="1" lang="ja-JP" altLang="en-US"/>
+              <a:t>レベル</a:t>
             </a:r>
           </a:p>
           <a:p>
             <a:pPr lvl="2"/>
             <a:r>
-              <a:rPr lang="en-US" dirty="0"/>
-              <a:t>Third level</a:t>
+              <a:rPr kumimoji="1" lang="ja-JP" altLang="en-US"/>
+              <a:t>第 </a:t>
+            </a:r>
+            <a:r>
+              <a:rPr kumimoji="1" lang="en-US" altLang="ja-JP"/>
+              <a:t>3 </a:t>
+            </a:r>
+            <a:r>
+              <a:rPr kumimoji="1" lang="ja-JP" altLang="en-US"/>
+              <a:t>レベル</a:t>
             </a:r>
           </a:p>
           <a:p>
             <a:pPr lvl="3"/>
             <a:r>
-              <a:rPr lang="en-US" dirty="0"/>
-              <a:t>Fourth level</a:t>
+              <a:rPr kumimoji="1" lang="ja-JP" altLang="en-US"/>
+              <a:t>第 </a:t>
+            </a:r>
+            <a:r>
+              <a:rPr kumimoji="1" lang="en-US" altLang="ja-JP"/>
+              <a:t>4 </a:t>
+            </a:r>
+            <a:r>
+              <a:rPr kumimoji="1" lang="ja-JP" altLang="en-US"/>
+              <a:t>レベル</a:t>
             </a:r>
           </a:p>
           <a:p>
             <a:pPr lvl="4"/>
             <a:r>
-              <a:rPr lang="en-US" dirty="0"/>
-              <a:t>Fifth level</a:t>
-            </a:r>
-          </a:p>
-        </p:txBody>
-      </p:sp>
-      <p:sp>
-        <p:nvSpPr>
-          <p:cNvPr id="5" name="Text Placeholder 4">
-            <a:extLst>
-              <a:ext uri="{FF2B5EF4-FFF2-40B4-BE49-F238E27FC236}">
-                <a16:creationId xmlns:a16="http://schemas.microsoft.com/office/drawing/2014/main" id="{2E6A38DC-A016-4CFD-AC19-F24A9E062022}"/>
+              <a:rPr kumimoji="1" lang="ja-JP" altLang="en-US"/>
+              <a:t>第 </a:t>
+            </a:r>
+            <a:r>
+              <a:rPr kumimoji="1" lang="en-US" altLang="ja-JP"/>
+              <a:t>5 </a:t>
+            </a:r>
+            <a:r>
+              <a:rPr kumimoji="1" lang="ja-JP" altLang="en-US"/>
+              <a:t>レベル</a:t>
+            </a:r>
+          </a:p>
+        </p:txBody>
+      </p:sp>
+      <p:sp>
+        <p:nvSpPr>
+          <p:cNvPr id="5" name="テキスト プレースホルダー 4">
+            <a:extLst>
+              <a:ext uri="{FF2B5EF4-FFF2-40B4-BE49-F238E27FC236}">
+                <a16:creationId xmlns:a16="http://schemas.microsoft.com/office/drawing/2014/main" id="{F1B95039-2C06-BA6B-C703-D601276D495B}"/>
               </a:ext>
             </a:extLst>
           </p:cNvPr>
@@ -1746,8 +1906,8 @@
         </p:nvSpPr>
         <p:spPr>
           <a:xfrm>
-            <a:off x="6344816" y="1681163"/>
-            <a:ext cx="5010572" cy="823912"/>
+            <a:off x="6172200" y="1681163"/>
+            <a:ext cx="5183188" cy="823912"/>
           </a:xfrm>
         </p:spPr>
         <p:txBody>
@@ -1793,18 +1953,18 @@
           <a:p>
             <a:pPr lvl="0"/>
             <a:r>
-              <a:rPr lang="en-US" dirty="0"/>
-              <a:t>Click to edit Master text styles</a:t>
-            </a:r>
-          </a:p>
-        </p:txBody>
-      </p:sp>
-      <p:sp>
-        <p:nvSpPr>
-          <p:cNvPr id="6" name="Content Placeholder 5">
-            <a:extLst>
-              <a:ext uri="{FF2B5EF4-FFF2-40B4-BE49-F238E27FC236}">
-                <a16:creationId xmlns:a16="http://schemas.microsoft.com/office/drawing/2014/main" id="{31F930FA-8C00-42AB-B2D1-FE4E4BDB3C6E}"/>
+              <a:rPr kumimoji="1" lang="ja-JP" altLang="en-US"/>
+              <a:t>マスター テキストの書式設定</a:t>
+            </a:r>
+          </a:p>
+        </p:txBody>
+      </p:sp>
+      <p:sp>
+        <p:nvSpPr>
+          <p:cNvPr id="6" name="コンテンツ プレースホルダー 5">
+            <a:extLst>
+              <a:ext uri="{FF2B5EF4-FFF2-40B4-BE49-F238E27FC236}">
+                <a16:creationId xmlns:a16="http://schemas.microsoft.com/office/drawing/2014/main" id="{8F19BC0F-B75D-FF72-6F62-EB21F5E7F6EF}"/>
               </a:ext>
             </a:extLst>
           </p:cNvPr>
@@ -1817,8 +1977,8 @@
         </p:nvSpPr>
         <p:spPr>
           <a:xfrm>
-            <a:off x="6344814" y="2505075"/>
-            <a:ext cx="5010573" cy="3684588"/>
+            <a:off x="6172200" y="2505075"/>
+            <a:ext cx="5183188" cy="3684588"/>
           </a:xfrm>
         </p:spPr>
         <p:txBody>
@@ -1827,46 +1987,78 @@
           <a:p>
             <a:pPr lvl="0"/>
             <a:r>
-              <a:rPr lang="en-US" dirty="0"/>
-              <a:t>Click to edit Master text styles</a:t>
+              <a:rPr kumimoji="1" lang="ja-JP" altLang="en-US"/>
+              <a:t>マスター テキストの書式設定</a:t>
             </a:r>
           </a:p>
           <a:p>
             <a:pPr lvl="1"/>
             <a:r>
-              <a:rPr lang="en-US" dirty="0"/>
-              <a:t>Second level</a:t>
+              <a:rPr kumimoji="1" lang="ja-JP" altLang="en-US"/>
+              <a:t>第 </a:t>
+            </a:r>
+            <a:r>
+              <a:rPr kumimoji="1" lang="en-US" altLang="ja-JP"/>
+              <a:t>2 </a:t>
+            </a:r>
+            <a:r>
+              <a:rPr kumimoji="1" lang="ja-JP" altLang="en-US"/>
+              <a:t>レベル</a:t>
             </a:r>
           </a:p>
           <a:p>
             <a:pPr lvl="2"/>
             <a:r>
-              <a:rPr lang="en-US" dirty="0"/>
-              <a:t>Third level</a:t>
+              <a:rPr kumimoji="1" lang="ja-JP" altLang="en-US"/>
+              <a:t>第 </a:t>
+            </a:r>
+            <a:r>
+              <a:rPr kumimoji="1" lang="en-US" altLang="ja-JP"/>
+              <a:t>3 </a:t>
+            </a:r>
+            <a:r>
+              <a:rPr kumimoji="1" lang="ja-JP" altLang="en-US"/>
+              <a:t>レベル</a:t>
             </a:r>
           </a:p>
           <a:p>
             <a:pPr lvl="3"/>
             <a:r>
-              <a:rPr lang="en-US" dirty="0"/>
-              <a:t>Fourth level</a:t>
+              <a:rPr kumimoji="1" lang="ja-JP" altLang="en-US"/>
+              <a:t>第 </a:t>
+            </a:r>
+            <a:r>
+              <a:rPr kumimoji="1" lang="en-US" altLang="ja-JP"/>
+              <a:t>4 </a:t>
+            </a:r>
+            <a:r>
+              <a:rPr kumimoji="1" lang="ja-JP" altLang="en-US"/>
+              <a:t>レベル</a:t>
             </a:r>
           </a:p>
           <a:p>
             <a:pPr lvl="4"/>
             <a:r>
-              <a:rPr lang="en-US" dirty="0"/>
-              <a:t>Fifth level</a:t>
-            </a:r>
-          </a:p>
-        </p:txBody>
-      </p:sp>
-      <p:sp>
-        <p:nvSpPr>
-          <p:cNvPr id="7" name="Date Placeholder 6">
-            <a:extLst>
-              <a:ext uri="{FF2B5EF4-FFF2-40B4-BE49-F238E27FC236}">
-                <a16:creationId xmlns:a16="http://schemas.microsoft.com/office/drawing/2014/main" id="{E18B698E-FAE5-4F2C-AE0E-4FD281E8F30E}"/>
+              <a:rPr kumimoji="1" lang="ja-JP" altLang="en-US"/>
+              <a:t>第 </a:t>
+            </a:r>
+            <a:r>
+              <a:rPr kumimoji="1" lang="en-US" altLang="ja-JP"/>
+              <a:t>5 </a:t>
+            </a:r>
+            <a:r>
+              <a:rPr kumimoji="1" lang="ja-JP" altLang="en-US"/>
+              <a:t>レベル</a:t>
+            </a:r>
+          </a:p>
+        </p:txBody>
+      </p:sp>
+      <p:sp>
+        <p:nvSpPr>
+          <p:cNvPr id="7" name="日付プレースホルダー 6">
+            <a:extLst>
+              <a:ext uri="{FF2B5EF4-FFF2-40B4-BE49-F238E27FC236}">
+                <a16:creationId xmlns:a16="http://schemas.microsoft.com/office/drawing/2014/main" id="{5916F7DF-B373-C409-E077-F734A08B4F29}"/>
               </a:ext>
             </a:extLst>
           </p:cNvPr>
@@ -1882,8 +2074,8 @@
           <a:bodyPr/>
           <a:lstStyle/>
           <a:p>
-            <a:fld id="{343D63E4-71A5-4C63-9515-748B28B89764}" type="datetimeFigureOut">
-              <a:rPr lang="en-US" dirty="0"/>
+            <a:fld id="{149C728D-416F-40D5-8F13-55E5DD1CE8D1}" type="datetimeFigureOut">
+              <a:rPr lang="en-US" smtClean="0"/>
               <a:t>6/29/25</a:t>
             </a:fld>
             <a:endParaRPr lang="en-US" dirty="0"/>
@@ -1892,10 +2084,10 @@
       </p:sp>
       <p:sp>
         <p:nvSpPr>
-          <p:cNvPr id="8" name="Footer Placeholder 7">
-            <a:extLst>
-              <a:ext uri="{FF2B5EF4-FFF2-40B4-BE49-F238E27FC236}">
-                <a16:creationId xmlns:a16="http://schemas.microsoft.com/office/drawing/2014/main" id="{B5C4BB6C-CAA4-4EA8-8EA1-65ADE056F25D}"/>
+          <p:cNvPr id="8" name="フッター プレースホルダー 7">
+            <a:extLst>
+              <a:ext uri="{FF2B5EF4-FFF2-40B4-BE49-F238E27FC236}">
+                <a16:creationId xmlns:a16="http://schemas.microsoft.com/office/drawing/2014/main" id="{250CDDA4-97CF-EFD7-EF62-8EB40753B683}"/>
               </a:ext>
             </a:extLst>
           </p:cNvPr>
@@ -1912,19 +2104,20 @@
           <a:lstStyle/>
           <a:p>
             <a:r>
-              <a:rPr lang="en-US" dirty="0"/>
+              <a:rPr lang="en-US"/>
               <a:t>
               </a:t>
             </a:r>
-          </a:p>
-        </p:txBody>
-      </p:sp>
-      <p:sp>
-        <p:nvSpPr>
-          <p:cNvPr id="9" name="Slide Number Placeholder 8">
-            <a:extLst>
-              <a:ext uri="{FF2B5EF4-FFF2-40B4-BE49-F238E27FC236}">
-                <a16:creationId xmlns:a16="http://schemas.microsoft.com/office/drawing/2014/main" id="{75BB6A12-0532-47CA-B070-232141CC1064}"/>
+            <a:endParaRPr lang="en-US" dirty="0"/>
+          </a:p>
+        </p:txBody>
+      </p:sp>
+      <p:sp>
+        <p:nvSpPr>
+          <p:cNvPr id="9" name="スライド番号プレースホルダー 8">
+            <a:extLst>
+              <a:ext uri="{FF2B5EF4-FFF2-40B4-BE49-F238E27FC236}">
+                <a16:creationId xmlns:a16="http://schemas.microsoft.com/office/drawing/2014/main" id="{98596375-7420-30F9-7F51-44C6C3884049}"/>
               </a:ext>
             </a:extLst>
           </p:cNvPr>
@@ -1941,7 +2134,7 @@
           <a:lstStyle/>
           <a:p>
             <a:fld id="{017DE1FC-E54A-4B87-A814-263D1E8654B2}" type="slidenum">
-              <a:rPr lang="en-US" dirty="0"/>
+              <a:rPr lang="en-US" smtClean="0"/>
               <a:t>‹#›</a:t>
             </a:fld>
             <a:endParaRPr lang="en-US" dirty="0"/>
@@ -1951,19 +2144,20 @@
     </p:spTree>
     <p:extLst>
       <p:ext uri="{BB962C8B-B14F-4D97-AF65-F5344CB8AC3E}">
-        <p14:creationId xmlns:p14="http://schemas.microsoft.com/office/powerpoint/2010/main" val="3532446079"/>
+        <p14:creationId xmlns:p14="http://schemas.microsoft.com/office/powerpoint/2010/main" val="109912783"/>
       </p:ext>
     </p:extLst>
   </p:cSld>
   <p:clrMapOvr>
     <a:masterClrMapping/>
   </p:clrMapOvr>
+  <p:hf hdr="0"/>
 </p:sldLayout>
 </file>
 
 <file path=ppt/slideLayouts/slideLayout6.xml><?xml version="1.0" encoding="utf-8"?>
 <p:sldLayout xmlns:a="http://schemas.openxmlformats.org/drawingml/2006/main" xmlns:r="http://schemas.openxmlformats.org/officeDocument/2006/relationships" xmlns:p="http://schemas.openxmlformats.org/presentationml/2006/main" type="titleOnly" preserve="1">
-  <p:cSld name="Title Only">
+  <p:cSld name="タイトルのみ">
     <p:spTree>
       <p:nvGrpSpPr>
         <p:cNvPr id="1" name=""/>
@@ -1980,10 +2174,10 @@
       </p:grpSpPr>
       <p:sp>
         <p:nvSpPr>
-          <p:cNvPr id="2" name="Title 1">
-            <a:extLst>
-              <a:ext uri="{FF2B5EF4-FFF2-40B4-BE49-F238E27FC236}">
-                <a16:creationId xmlns:a16="http://schemas.microsoft.com/office/drawing/2014/main" id="{9B608FA1-831E-4AD6-B0D1-BA85E67A5032}"/>
+          <p:cNvPr id="2" name="タイトル 1">
+            <a:extLst>
+              <a:ext uri="{FF2B5EF4-FFF2-40B4-BE49-F238E27FC236}">
+                <a16:creationId xmlns:a16="http://schemas.microsoft.com/office/drawing/2014/main" id="{F1EC15F3-ED3B-FB55-74F0-A3E03E605E30}"/>
               </a:ext>
             </a:extLst>
           </p:cNvPr>
@@ -1994,35 +2188,24 @@
             <p:ph type="title"/>
           </p:nvPr>
         </p:nvSpPr>
-        <p:spPr>
-          <a:xfrm>
-            <a:off x="1371599" y="457200"/>
-            <a:ext cx="9982199" cy="1233488"/>
-          </a:xfrm>
-        </p:spPr>
-        <p:txBody>
-          <a:bodyPr>
-            <a:normAutofit/>
-          </a:bodyPr>
-          <a:lstStyle>
-            <a:lvl1pPr>
-              <a:defRPr sz="3200"/>
-            </a:lvl1pPr>
-          </a:lstStyle>
-          <a:p>
-            <a:r>
-              <a:rPr lang="en-US" dirty="0"/>
-              <a:t>Click to edit Master title style</a:t>
-            </a:r>
-          </a:p>
-        </p:txBody>
-      </p:sp>
-      <p:sp>
-        <p:nvSpPr>
-          <p:cNvPr id="3" name="Date Placeholder 2">
-            <a:extLst>
-              <a:ext uri="{FF2B5EF4-FFF2-40B4-BE49-F238E27FC236}">
-                <a16:creationId xmlns:a16="http://schemas.microsoft.com/office/drawing/2014/main" id="{ACE94142-C469-4B0E-8C01-C64BA28F52D2}"/>
+        <p:spPr/>
+        <p:txBody>
+          <a:bodyPr/>
+          <a:lstStyle/>
+          <a:p>
+            <a:r>
+              <a:rPr kumimoji="1" lang="ja-JP" altLang="en-US"/>
+              <a:t>マスター タイトルの書式設定</a:t>
+            </a:r>
+          </a:p>
+        </p:txBody>
+      </p:sp>
+      <p:sp>
+        <p:nvSpPr>
+          <p:cNvPr id="3" name="日付プレースホルダー 2">
+            <a:extLst>
+              <a:ext uri="{FF2B5EF4-FFF2-40B4-BE49-F238E27FC236}">
+                <a16:creationId xmlns:a16="http://schemas.microsoft.com/office/drawing/2014/main" id="{A8AEF192-5B3F-817D-F1FA-57547A42AF91}"/>
               </a:ext>
             </a:extLst>
           </p:cNvPr>
@@ -2038,8 +2221,8 @@
           <a:bodyPr/>
           <a:lstStyle/>
           <a:p>
-            <a:fld id="{C7C92BAC-F228-4DAC-8800-3D810F869187}" type="datetimeFigureOut">
-              <a:rPr lang="en-US" dirty="0"/>
+            <a:fld id="{149C728D-416F-40D5-8F13-55E5DD1CE8D1}" type="datetimeFigureOut">
+              <a:rPr lang="en-US" smtClean="0"/>
               <a:t>6/29/25</a:t>
             </a:fld>
             <a:endParaRPr lang="en-US" dirty="0"/>
@@ -2048,10 +2231,10 @@
       </p:sp>
       <p:sp>
         <p:nvSpPr>
-          <p:cNvPr id="4" name="Footer Placeholder 3">
-            <a:extLst>
-              <a:ext uri="{FF2B5EF4-FFF2-40B4-BE49-F238E27FC236}">
-                <a16:creationId xmlns:a16="http://schemas.microsoft.com/office/drawing/2014/main" id="{02AAFCE6-5C7E-438F-8D4A-21E155681447}"/>
+          <p:cNvPr id="4" name="フッター プレースホルダー 3">
+            <a:extLst>
+              <a:ext uri="{FF2B5EF4-FFF2-40B4-BE49-F238E27FC236}">
+                <a16:creationId xmlns:a16="http://schemas.microsoft.com/office/drawing/2014/main" id="{183BE4F4-F2CD-8C4A-F6E8-69A05CE19AF5}"/>
               </a:ext>
             </a:extLst>
           </p:cNvPr>
@@ -2068,19 +2251,20 @@
           <a:lstStyle/>
           <a:p>
             <a:r>
-              <a:rPr lang="en-US" dirty="0"/>
+              <a:rPr lang="en-US"/>
               <a:t>
               </a:t>
             </a:r>
-          </a:p>
-        </p:txBody>
-      </p:sp>
-      <p:sp>
-        <p:nvSpPr>
-          <p:cNvPr id="5" name="Slide Number Placeholder 4">
-            <a:extLst>
-              <a:ext uri="{FF2B5EF4-FFF2-40B4-BE49-F238E27FC236}">
-                <a16:creationId xmlns:a16="http://schemas.microsoft.com/office/drawing/2014/main" id="{D2ACFD88-63EA-427F-978C-B7844D1A5E32}"/>
+            <a:endParaRPr lang="en-US" dirty="0"/>
+          </a:p>
+        </p:txBody>
+      </p:sp>
+      <p:sp>
+        <p:nvSpPr>
+          <p:cNvPr id="5" name="スライド番号プレースホルダー 4">
+            <a:extLst>
+              <a:ext uri="{FF2B5EF4-FFF2-40B4-BE49-F238E27FC236}">
+                <a16:creationId xmlns:a16="http://schemas.microsoft.com/office/drawing/2014/main" id="{D26D8CE8-0E83-665D-1D20-9099AA71B8EC}"/>
               </a:ext>
             </a:extLst>
           </p:cNvPr>
@@ -2097,7 +2281,7 @@
           <a:lstStyle/>
           <a:p>
             <a:fld id="{017DE1FC-E54A-4B87-A814-263D1E8654B2}" type="slidenum">
-              <a:rPr lang="en-US" dirty="0"/>
+              <a:rPr lang="en-US" smtClean="0"/>
               <a:t>‹#›</a:t>
             </a:fld>
             <a:endParaRPr lang="en-US" dirty="0"/>
@@ -2107,19 +2291,20 @@
     </p:spTree>
     <p:extLst>
       <p:ext uri="{BB962C8B-B14F-4D97-AF65-F5344CB8AC3E}">
-        <p14:creationId xmlns:p14="http://schemas.microsoft.com/office/powerpoint/2010/main" val="2005593685"/>
+        <p14:creationId xmlns:p14="http://schemas.microsoft.com/office/powerpoint/2010/main" val="3732718287"/>
       </p:ext>
     </p:extLst>
   </p:cSld>
   <p:clrMapOvr>
     <a:masterClrMapping/>
   </p:clrMapOvr>
+  <p:hf hdr="0"/>
 </p:sldLayout>
 </file>
 
 <file path=ppt/slideLayouts/slideLayout7.xml><?xml version="1.0" encoding="utf-8"?>
 <p:sldLayout xmlns:a="http://schemas.openxmlformats.org/drawingml/2006/main" xmlns:r="http://schemas.openxmlformats.org/officeDocument/2006/relationships" xmlns:p="http://schemas.openxmlformats.org/presentationml/2006/main" type="blank" preserve="1">
-  <p:cSld name="Blank">
+  <p:cSld name="白紙">
     <p:spTree>
       <p:nvGrpSpPr>
         <p:cNvPr id="1" name=""/>
@@ -2136,10 +2321,10 @@
       </p:grpSpPr>
       <p:sp>
         <p:nvSpPr>
-          <p:cNvPr id="2" name="Date Placeholder 1">
-            <a:extLst>
-              <a:ext uri="{FF2B5EF4-FFF2-40B4-BE49-F238E27FC236}">
-                <a16:creationId xmlns:a16="http://schemas.microsoft.com/office/drawing/2014/main" id="{6682A4F0-76A5-4852-982B-32B3B685732E}"/>
+          <p:cNvPr id="2" name="日付プレースホルダー 1">
+            <a:extLst>
+              <a:ext uri="{FF2B5EF4-FFF2-40B4-BE49-F238E27FC236}">
+                <a16:creationId xmlns:a16="http://schemas.microsoft.com/office/drawing/2014/main" id="{F0EBF982-07B2-DBCF-09E9-C2D02D6523FD}"/>
               </a:ext>
             </a:extLst>
           </p:cNvPr>
@@ -2155,8 +2340,8 @@
           <a:bodyPr/>
           <a:lstStyle/>
           <a:p>
-            <a:fld id="{B66EFFE8-7E8E-427A-AB26-E496551AFB7B}" type="datetimeFigureOut">
-              <a:rPr lang="en-US" dirty="0"/>
+            <a:fld id="{149C728D-416F-40D5-8F13-55E5DD1CE8D1}" type="datetimeFigureOut">
+              <a:rPr lang="en-US" smtClean="0"/>
               <a:t>6/29/25</a:t>
             </a:fld>
             <a:endParaRPr lang="en-US" dirty="0"/>
@@ -2165,10 +2350,10 @@
       </p:sp>
       <p:sp>
         <p:nvSpPr>
-          <p:cNvPr id="3" name="Footer Placeholder 2">
-            <a:extLst>
-              <a:ext uri="{FF2B5EF4-FFF2-40B4-BE49-F238E27FC236}">
-                <a16:creationId xmlns:a16="http://schemas.microsoft.com/office/drawing/2014/main" id="{8750CFAE-4BEB-4272-A2E6-FDD9D6A03290}"/>
+          <p:cNvPr id="3" name="フッター プレースホルダー 2">
+            <a:extLst>
+              <a:ext uri="{FF2B5EF4-FFF2-40B4-BE49-F238E27FC236}">
+                <a16:creationId xmlns:a16="http://schemas.microsoft.com/office/drawing/2014/main" id="{59BA63AE-0A81-CE84-A50B-162B4C36DA7D}"/>
               </a:ext>
             </a:extLst>
           </p:cNvPr>
@@ -2185,19 +2370,20 @@
           <a:lstStyle/>
           <a:p>
             <a:r>
-              <a:rPr lang="en-US" dirty="0"/>
+              <a:rPr lang="en-US"/>
               <a:t>
               </a:t>
             </a:r>
-          </a:p>
-        </p:txBody>
-      </p:sp>
-      <p:sp>
-        <p:nvSpPr>
-          <p:cNvPr id="4" name="Slide Number Placeholder 3">
-            <a:extLst>
-              <a:ext uri="{FF2B5EF4-FFF2-40B4-BE49-F238E27FC236}">
-                <a16:creationId xmlns:a16="http://schemas.microsoft.com/office/drawing/2014/main" id="{943B71B7-74B7-4CF1-8FE0-F4863CD7D97C}"/>
+            <a:endParaRPr lang="en-US" dirty="0"/>
+          </a:p>
+        </p:txBody>
+      </p:sp>
+      <p:sp>
+        <p:nvSpPr>
+          <p:cNvPr id="4" name="スライド番号プレースホルダー 3">
+            <a:extLst>
+              <a:ext uri="{FF2B5EF4-FFF2-40B4-BE49-F238E27FC236}">
+                <a16:creationId xmlns:a16="http://schemas.microsoft.com/office/drawing/2014/main" id="{E7E5DE18-3664-ABF3-FC44-D77C043DA678}"/>
               </a:ext>
             </a:extLst>
           </p:cNvPr>
@@ -2214,7 +2400,7 @@
           <a:lstStyle/>
           <a:p>
             <a:fld id="{017DE1FC-E54A-4B87-A814-263D1E8654B2}" type="slidenum">
-              <a:rPr lang="en-US" dirty="0"/>
+              <a:rPr lang="en-US" smtClean="0"/>
               <a:t>‹#›</a:t>
             </a:fld>
             <a:endParaRPr lang="en-US" dirty="0"/>
@@ -2224,19 +2410,20 @@
     </p:spTree>
     <p:extLst>
       <p:ext uri="{BB962C8B-B14F-4D97-AF65-F5344CB8AC3E}">
-        <p14:creationId xmlns:p14="http://schemas.microsoft.com/office/powerpoint/2010/main" val="3135782635"/>
+        <p14:creationId xmlns:p14="http://schemas.microsoft.com/office/powerpoint/2010/main" val="484427136"/>
       </p:ext>
     </p:extLst>
   </p:cSld>
   <p:clrMapOvr>
     <a:masterClrMapping/>
   </p:clrMapOvr>
+  <p:hf hdr="0"/>
 </p:sldLayout>
 </file>
 
 <file path=ppt/slideLayouts/slideLayout8.xml><?xml version="1.0" encoding="utf-8"?>
 <p:sldLayout xmlns:a="http://schemas.openxmlformats.org/drawingml/2006/main" xmlns:r="http://schemas.openxmlformats.org/officeDocument/2006/relationships" xmlns:p="http://schemas.openxmlformats.org/presentationml/2006/main" type="objTx" preserve="1">
-  <p:cSld name="Content with Caption">
+  <p:cSld name="タイトル付きのコンテンツ">
     <p:spTree>
       <p:nvGrpSpPr>
         <p:cNvPr id="1" name=""/>
@@ -2253,10 +2440,10 @@
       </p:grpSpPr>
       <p:sp>
         <p:nvSpPr>
-          <p:cNvPr id="2" name="Title 1">
-            <a:extLst>
-              <a:ext uri="{FF2B5EF4-FFF2-40B4-BE49-F238E27FC236}">
-                <a16:creationId xmlns:a16="http://schemas.microsoft.com/office/drawing/2014/main" id="{FDF432BE-C4E5-4F12-AB53-EBEF2B76B251}"/>
+          <p:cNvPr id="2" name="タイトル 1">
+            <a:extLst>
+              <a:ext uri="{FF2B5EF4-FFF2-40B4-BE49-F238E27FC236}">
+                <a16:creationId xmlns:a16="http://schemas.microsoft.com/office/drawing/2014/main" id="{2D400C6F-B09E-FF12-3517-576DEBD97736}"/>
               </a:ext>
             </a:extLst>
           </p:cNvPr>
@@ -2269,8 +2456,8 @@
         </p:nvSpPr>
         <p:spPr>
           <a:xfrm>
-            <a:off x="1318755" y="457200"/>
-            <a:ext cx="3932237" cy="1921434"/>
+            <a:off x="839788" y="457200"/>
+            <a:ext cx="3932237" cy="1600200"/>
           </a:xfrm>
         </p:spPr>
         <p:txBody>
@@ -2282,18 +2469,18 @@
           </a:lstStyle>
           <a:p>
             <a:r>
-              <a:rPr lang="en-US" dirty="0"/>
-              <a:t>Click to edit Master title style</a:t>
-            </a:r>
-          </a:p>
-        </p:txBody>
-      </p:sp>
-      <p:sp>
-        <p:nvSpPr>
-          <p:cNvPr id="3" name="Content Placeholder 2">
-            <a:extLst>
-              <a:ext uri="{FF2B5EF4-FFF2-40B4-BE49-F238E27FC236}">
-                <a16:creationId xmlns:a16="http://schemas.microsoft.com/office/drawing/2014/main" id="{DFAE7F57-4ABF-4BA4-A892-38857A02F60D}"/>
+              <a:rPr kumimoji="1" lang="ja-JP" altLang="en-US"/>
+              <a:t>マスター タイトルの書式設定</a:t>
+            </a:r>
+          </a:p>
+        </p:txBody>
+      </p:sp>
+      <p:sp>
+        <p:nvSpPr>
+          <p:cNvPr id="3" name="コンテンツ プレースホルダー 2">
+            <a:extLst>
+              <a:ext uri="{FF2B5EF4-FFF2-40B4-BE49-F238E27FC236}">
+                <a16:creationId xmlns:a16="http://schemas.microsoft.com/office/drawing/2014/main" id="{6CB743F1-17EA-6428-1EE9-94E19276C8CF}"/>
               </a:ext>
             </a:extLst>
           </p:cNvPr>
@@ -2306,86 +2493,116 @@
         </p:nvSpPr>
         <p:spPr>
           <a:xfrm>
-            <a:off x="5648130" y="987425"/>
-            <a:ext cx="5707257" cy="4873625"/>
+            <a:off x="5183188" y="987425"/>
+            <a:ext cx="6172200" cy="4873625"/>
           </a:xfrm>
         </p:spPr>
         <p:txBody>
-          <a:bodyPr>
-            <a:normAutofit/>
-          </a:bodyPr>
+          <a:bodyPr/>
           <a:lstStyle>
             <a:lvl1pPr>
-              <a:defRPr sz="2800"/>
+              <a:defRPr sz="3200"/>
             </a:lvl1pPr>
             <a:lvl2pPr>
-              <a:defRPr sz="2400"/>
+              <a:defRPr sz="2800"/>
             </a:lvl2pPr>
             <a:lvl3pPr>
-              <a:defRPr sz="2000"/>
+              <a:defRPr sz="2400"/>
             </a:lvl3pPr>
             <a:lvl4pPr>
-              <a:defRPr sz="1800"/>
+              <a:defRPr sz="2000"/>
             </a:lvl4pPr>
             <a:lvl5pPr>
-              <a:defRPr sz="1800"/>
+              <a:defRPr sz="2000"/>
             </a:lvl5pPr>
             <a:lvl6pPr>
-              <a:defRPr sz="1800"/>
+              <a:defRPr sz="2000"/>
             </a:lvl6pPr>
             <a:lvl7pPr>
-              <a:defRPr sz="1800"/>
+              <a:defRPr sz="2000"/>
             </a:lvl7pPr>
             <a:lvl8pPr>
-              <a:defRPr sz="1800"/>
+              <a:defRPr sz="2000"/>
             </a:lvl8pPr>
             <a:lvl9pPr>
-              <a:defRPr sz="1800"/>
+              <a:defRPr sz="2000"/>
             </a:lvl9pPr>
           </a:lstStyle>
           <a:p>
             <a:pPr lvl="0"/>
             <a:r>
-              <a:rPr lang="en-US" dirty="0"/>
-              <a:t>Click to edit Master text styles</a:t>
+              <a:rPr kumimoji="1" lang="ja-JP" altLang="en-US"/>
+              <a:t>マスター テキストの書式設定</a:t>
             </a:r>
           </a:p>
           <a:p>
             <a:pPr lvl="1"/>
             <a:r>
-              <a:rPr lang="en-US" dirty="0"/>
-              <a:t>Second level</a:t>
+              <a:rPr kumimoji="1" lang="ja-JP" altLang="en-US"/>
+              <a:t>第 </a:t>
+            </a:r>
+            <a:r>
+              <a:rPr kumimoji="1" lang="en-US" altLang="ja-JP"/>
+              <a:t>2 </a:t>
+            </a:r>
+            <a:r>
+              <a:rPr kumimoji="1" lang="ja-JP" altLang="en-US"/>
+              <a:t>レベル</a:t>
             </a:r>
           </a:p>
           <a:p>
             <a:pPr lvl="2"/>
             <a:r>
-              <a:rPr lang="en-US" dirty="0"/>
-              <a:t>Third level</a:t>
+              <a:rPr kumimoji="1" lang="ja-JP" altLang="en-US"/>
+              <a:t>第 </a:t>
+            </a:r>
+            <a:r>
+              <a:rPr kumimoji="1" lang="en-US" altLang="ja-JP"/>
+              <a:t>3 </a:t>
+            </a:r>
+            <a:r>
+              <a:rPr kumimoji="1" lang="ja-JP" altLang="en-US"/>
+              <a:t>レベル</a:t>
             </a:r>
           </a:p>
           <a:p>
             <a:pPr lvl="3"/>
             <a:r>
-              <a:rPr lang="en-US" dirty="0"/>
-              <a:t>Fourth level</a:t>
+              <a:rPr kumimoji="1" lang="ja-JP" altLang="en-US"/>
+              <a:t>第 </a:t>
+            </a:r>
+            <a:r>
+              <a:rPr kumimoji="1" lang="en-US" altLang="ja-JP"/>
+              <a:t>4 </a:t>
+            </a:r>
+            <a:r>
+              <a:rPr kumimoji="1" lang="ja-JP" altLang="en-US"/>
+              <a:t>レベル</a:t>
             </a:r>
           </a:p>
           <a:p>
             <a:pPr lvl="4"/>
             <a:r>
-              <a:rPr lang="en-US" dirty="0"/>
-              <a:t>Fifth level</a:t>
-            </a:r>
-          </a:p>
-        </p:txBody>
-      </p:sp>
-      <p:sp>
-        <p:nvSpPr>
-          <p:cNvPr id="4" name="Text Placeholder 3">
-            <a:extLst>
-              <a:ext uri="{FF2B5EF4-FFF2-40B4-BE49-F238E27FC236}">
-                <a16:creationId xmlns:a16="http://schemas.microsoft.com/office/drawing/2014/main" id="{D032E444-E5BD-443F-AB83-84D7CE0AB768}"/>
+              <a:rPr kumimoji="1" lang="ja-JP" altLang="en-US"/>
+              <a:t>第 </a:t>
+            </a:r>
+            <a:r>
+              <a:rPr kumimoji="1" lang="en-US" altLang="ja-JP"/>
+              <a:t>5 </a:t>
+            </a:r>
+            <a:r>
+              <a:rPr kumimoji="1" lang="ja-JP" altLang="en-US"/>
+              <a:t>レベル</a:t>
+            </a:r>
+          </a:p>
+        </p:txBody>
+      </p:sp>
+      <p:sp>
+        <p:nvSpPr>
+          <p:cNvPr id="4" name="テキスト プレースホルダー 3">
+            <a:extLst>
+              <a:ext uri="{FF2B5EF4-FFF2-40B4-BE49-F238E27FC236}">
+                <a16:creationId xmlns:a16="http://schemas.microsoft.com/office/drawing/2014/main" id="{361E3DC8-20A8-4BFB-25BF-8D50E77E4C2B}"/>
               </a:ext>
             </a:extLst>
           </p:cNvPr>
@@ -2398,8 +2615,8 @@
         </p:nvSpPr>
         <p:spPr>
           <a:xfrm>
-            <a:off x="1318755" y="2799184"/>
-            <a:ext cx="3932237" cy="3069803"/>
+            <a:off x="839788" y="2057400"/>
+            <a:ext cx="3932237" cy="3811588"/>
           </a:xfrm>
         </p:spPr>
         <p:txBody>
@@ -2445,18 +2662,18 @@
           <a:p>
             <a:pPr lvl="0"/>
             <a:r>
-              <a:rPr lang="en-US" dirty="0"/>
-              <a:t>Click to edit Master text styles</a:t>
-            </a:r>
-          </a:p>
-        </p:txBody>
-      </p:sp>
-      <p:sp>
-        <p:nvSpPr>
-          <p:cNvPr id="5" name="Date Placeholder 4">
-            <a:extLst>
-              <a:ext uri="{FF2B5EF4-FFF2-40B4-BE49-F238E27FC236}">
-                <a16:creationId xmlns:a16="http://schemas.microsoft.com/office/drawing/2014/main" id="{211998A4-FD2F-4126-99C5-E2063AE02482}"/>
+              <a:rPr kumimoji="1" lang="ja-JP" altLang="en-US"/>
+              <a:t>マスター テキストの書式設定</a:t>
+            </a:r>
+          </a:p>
+        </p:txBody>
+      </p:sp>
+      <p:sp>
+        <p:nvSpPr>
+          <p:cNvPr id="5" name="日付プレースホルダー 4">
+            <a:extLst>
+              <a:ext uri="{FF2B5EF4-FFF2-40B4-BE49-F238E27FC236}">
+                <a16:creationId xmlns:a16="http://schemas.microsoft.com/office/drawing/2014/main" id="{81133DBE-D437-FF89-D79C-DFD79ADDC713}"/>
               </a:ext>
             </a:extLst>
           </p:cNvPr>
@@ -2472,8 +2689,8 @@
           <a:bodyPr/>
           <a:lstStyle/>
           <a:p>
-            <a:fld id="{C0DC8B19-DE76-4E18-BFC7-EB25B8C421E7}" type="datetimeFigureOut">
-              <a:rPr lang="en-US" dirty="0"/>
+            <a:fld id="{149C728D-416F-40D5-8F13-55E5DD1CE8D1}" type="datetimeFigureOut">
+              <a:rPr lang="en-US" smtClean="0"/>
               <a:t>6/29/25</a:t>
             </a:fld>
             <a:endParaRPr lang="en-US" dirty="0"/>
@@ -2482,10 +2699,10 @@
       </p:sp>
       <p:sp>
         <p:nvSpPr>
-          <p:cNvPr id="6" name="Footer Placeholder 5">
-            <a:extLst>
-              <a:ext uri="{FF2B5EF4-FFF2-40B4-BE49-F238E27FC236}">
-                <a16:creationId xmlns:a16="http://schemas.microsoft.com/office/drawing/2014/main" id="{E96457D3-F808-4DB2-9C9C-B185E71F26DA}"/>
+          <p:cNvPr id="6" name="フッター プレースホルダー 5">
+            <a:extLst>
+              <a:ext uri="{FF2B5EF4-FFF2-40B4-BE49-F238E27FC236}">
+                <a16:creationId xmlns:a16="http://schemas.microsoft.com/office/drawing/2014/main" id="{60B619BC-4919-0999-CFC9-B4881A88E5FC}"/>
               </a:ext>
             </a:extLst>
           </p:cNvPr>
@@ -2502,19 +2719,20 @@
           <a:lstStyle/>
           <a:p>
             <a:r>
-              <a:rPr lang="en-US" dirty="0"/>
+              <a:rPr lang="en-US"/>
               <a:t>
               </a:t>
             </a:r>
-          </a:p>
-        </p:txBody>
-      </p:sp>
-      <p:sp>
-        <p:nvSpPr>
-          <p:cNvPr id="7" name="Slide Number Placeholder 6">
-            <a:extLst>
-              <a:ext uri="{FF2B5EF4-FFF2-40B4-BE49-F238E27FC236}">
-                <a16:creationId xmlns:a16="http://schemas.microsoft.com/office/drawing/2014/main" id="{4131BC9B-21D1-4D2D-B02E-C887A02CA373}"/>
+            <a:endParaRPr lang="en-US" dirty="0"/>
+          </a:p>
+        </p:txBody>
+      </p:sp>
+      <p:sp>
+        <p:nvSpPr>
+          <p:cNvPr id="7" name="スライド番号プレースホルダー 6">
+            <a:extLst>
+              <a:ext uri="{FF2B5EF4-FFF2-40B4-BE49-F238E27FC236}">
+                <a16:creationId xmlns:a16="http://schemas.microsoft.com/office/drawing/2014/main" id="{EE77D24E-8F04-992B-9328-279CB32A670A}"/>
               </a:ext>
             </a:extLst>
           </p:cNvPr>
@@ -2531,7 +2749,7 @@
           <a:lstStyle/>
           <a:p>
             <a:fld id="{017DE1FC-E54A-4B87-A814-263D1E8654B2}" type="slidenum">
-              <a:rPr lang="en-US" dirty="0"/>
+              <a:rPr lang="en-US" smtClean="0"/>
               <a:t>‹#›</a:t>
             </a:fld>
             <a:endParaRPr lang="en-US" dirty="0"/>
@@ -2541,19 +2759,20 @@
     </p:spTree>
     <p:extLst>
       <p:ext uri="{BB962C8B-B14F-4D97-AF65-F5344CB8AC3E}">
-        <p14:creationId xmlns:p14="http://schemas.microsoft.com/office/powerpoint/2010/main" val="2542868436"/>
+        <p14:creationId xmlns:p14="http://schemas.microsoft.com/office/powerpoint/2010/main" val="3494221866"/>
       </p:ext>
     </p:extLst>
   </p:cSld>
   <p:clrMapOvr>
     <a:masterClrMapping/>
   </p:clrMapOvr>
+  <p:hf hdr="0"/>
 </p:sldLayout>
 </file>
 
 <file path=ppt/slideLayouts/slideLayout9.xml><?xml version="1.0" encoding="utf-8"?>
 <p:sldLayout xmlns:a="http://schemas.openxmlformats.org/drawingml/2006/main" xmlns:r="http://schemas.openxmlformats.org/officeDocument/2006/relationships" xmlns:p="http://schemas.openxmlformats.org/presentationml/2006/main" type="picTx" preserve="1">
-  <p:cSld name="Picture with Caption">
+  <p:cSld name="タイトル付きの図">
     <p:spTree>
       <p:nvGrpSpPr>
         <p:cNvPr id="1" name=""/>
@@ -2570,10 +2789,10 @@
       </p:grpSpPr>
       <p:sp>
         <p:nvSpPr>
-          <p:cNvPr id="2" name="Title 1">
-            <a:extLst>
-              <a:ext uri="{FF2B5EF4-FFF2-40B4-BE49-F238E27FC236}">
-                <a16:creationId xmlns:a16="http://schemas.microsoft.com/office/drawing/2014/main" id="{59143EC2-2D8C-4E8D-8CC7-9676480146E2}"/>
+          <p:cNvPr id="2" name="タイトル 1">
+            <a:extLst>
+              <a:ext uri="{FF2B5EF4-FFF2-40B4-BE49-F238E27FC236}">
+                <a16:creationId xmlns:a16="http://schemas.microsoft.com/office/drawing/2014/main" id="{F94DCF93-627E-3126-7DDD-B95071B0302B}"/>
               </a:ext>
             </a:extLst>
           </p:cNvPr>
@@ -2586,7 +2805,7 @@
         </p:nvSpPr>
         <p:spPr>
           <a:xfrm>
-            <a:off x="1378966" y="681135"/>
+            <a:off x="839788" y="457200"/>
             <a:ext cx="3932237" cy="1600200"/>
           </a:xfrm>
         </p:spPr>
@@ -2599,23 +2818,23 @@
           </a:lstStyle>
           <a:p>
             <a:r>
-              <a:rPr lang="en-US" dirty="0"/>
-              <a:t>Click to edit Master title style</a:t>
-            </a:r>
-          </a:p>
-        </p:txBody>
-      </p:sp>
-      <p:sp>
-        <p:nvSpPr>
-          <p:cNvPr id="3" name="Picture Placeholder 2">
-            <a:extLst>
-              <a:ext uri="{FF2B5EF4-FFF2-40B4-BE49-F238E27FC236}">
-                <a16:creationId xmlns:a16="http://schemas.microsoft.com/office/drawing/2014/main" id="{6566AF89-5FBD-43DD-958D-A5C608AE2E2C}"/>
+              <a:rPr kumimoji="1" lang="ja-JP" altLang="en-US"/>
+              <a:t>マスター タイトルの書式設定</a:t>
+            </a:r>
+          </a:p>
+        </p:txBody>
+      </p:sp>
+      <p:sp>
+        <p:nvSpPr>
+          <p:cNvPr id="3" name="図プレースホルダー 2">
+            <a:extLst>
+              <a:ext uri="{FF2B5EF4-FFF2-40B4-BE49-F238E27FC236}">
+                <a16:creationId xmlns:a16="http://schemas.microsoft.com/office/drawing/2014/main" id="{9620222F-2C96-48A5-0085-2E6992ACFC4A}"/>
               </a:ext>
             </a:extLst>
           </p:cNvPr>
           <p:cNvSpPr>
-            <a:spLocks noGrp="1" noChangeAspect="1"/>
+            <a:spLocks noGrp="1"/>
           </p:cNvSpPr>
           <p:nvPr>
             <p:ph type="pic" idx="1"/>
@@ -2623,12 +2842,12 @@
         </p:nvSpPr>
         <p:spPr>
           <a:xfrm>
-            <a:off x="5834742" y="858417"/>
-            <a:ext cx="5520645" cy="5002634"/>
+            <a:off x="5183188" y="987425"/>
+            <a:ext cx="6172200" cy="4873625"/>
           </a:xfrm>
         </p:spPr>
         <p:txBody>
-          <a:bodyPr anchor="t"/>
+          <a:bodyPr/>
           <a:lstStyle>
             <a:lvl1pPr marL="0" indent="0">
               <a:buNone/>
@@ -2668,16 +2887,16 @@
             </a:lvl9pPr>
           </a:lstStyle>
           <a:p>
-            <a:endParaRPr lang="en-US" dirty="0"/>
-          </a:p>
-        </p:txBody>
-      </p:sp>
-      <p:sp>
-        <p:nvSpPr>
-          <p:cNvPr id="4" name="Text Placeholder 3">
-            <a:extLst>
-              <a:ext uri="{FF2B5EF4-FFF2-40B4-BE49-F238E27FC236}">
-                <a16:creationId xmlns:a16="http://schemas.microsoft.com/office/drawing/2014/main" id="{F770A545-2CE6-48C4-A725-EF68A3F1BFCB}"/>
+            <a:endParaRPr kumimoji="1" lang="ja-JP" altLang="en-US"/>
+          </a:p>
+        </p:txBody>
+      </p:sp>
+      <p:sp>
+        <p:nvSpPr>
+          <p:cNvPr id="4" name="テキスト プレースホルダー 3">
+            <a:extLst>
+              <a:ext uri="{FF2B5EF4-FFF2-40B4-BE49-F238E27FC236}">
+                <a16:creationId xmlns:a16="http://schemas.microsoft.com/office/drawing/2014/main" id="{936C7189-00AA-02DF-1BD0-5C1F3142B4DF}"/>
               </a:ext>
             </a:extLst>
           </p:cNvPr>
@@ -2690,7 +2909,7 @@
         </p:nvSpPr>
         <p:spPr>
           <a:xfrm>
-            <a:off x="1378966" y="2281335"/>
+            <a:off x="839788" y="2057400"/>
             <a:ext cx="3932237" cy="3811588"/>
           </a:xfrm>
         </p:spPr>
@@ -2737,18 +2956,18 @@
           <a:p>
             <a:pPr lvl="0"/>
             <a:r>
-              <a:rPr lang="en-US" dirty="0"/>
-              <a:t>Click to edit Master text styles</a:t>
-            </a:r>
-          </a:p>
-        </p:txBody>
-      </p:sp>
-      <p:sp>
-        <p:nvSpPr>
-          <p:cNvPr id="5" name="Date Placeholder 4">
-            <a:extLst>
-              <a:ext uri="{FF2B5EF4-FFF2-40B4-BE49-F238E27FC236}">
-                <a16:creationId xmlns:a16="http://schemas.microsoft.com/office/drawing/2014/main" id="{FB4466B2-6FE6-4352-BBF9-84BCD946C28B}"/>
+              <a:rPr kumimoji="1" lang="ja-JP" altLang="en-US"/>
+              <a:t>マスター テキストの書式設定</a:t>
+            </a:r>
+          </a:p>
+        </p:txBody>
+      </p:sp>
+      <p:sp>
+        <p:nvSpPr>
+          <p:cNvPr id="5" name="日付プレースホルダー 4">
+            <a:extLst>
+              <a:ext uri="{FF2B5EF4-FFF2-40B4-BE49-F238E27FC236}">
+                <a16:creationId xmlns:a16="http://schemas.microsoft.com/office/drawing/2014/main" id="{D1280005-90EC-630F-17C5-001DA196CB1D}"/>
               </a:ext>
             </a:extLst>
           </p:cNvPr>
@@ -2764,8 +2983,8 @@
           <a:bodyPr/>
           <a:lstStyle/>
           <a:p>
-            <a:fld id="{9C10BD94-1F69-4074-BD82-D6EDB89FE74F}" type="datetimeFigureOut">
-              <a:rPr lang="en-US" dirty="0"/>
+            <a:fld id="{149C728D-416F-40D5-8F13-55E5DD1CE8D1}" type="datetimeFigureOut">
+              <a:rPr lang="en-US" smtClean="0"/>
               <a:t>6/29/25</a:t>
             </a:fld>
             <a:endParaRPr lang="en-US" dirty="0"/>
@@ -2774,10 +2993,10 @@
       </p:sp>
       <p:sp>
         <p:nvSpPr>
-          <p:cNvPr id="6" name="Footer Placeholder 5">
-            <a:extLst>
-              <a:ext uri="{FF2B5EF4-FFF2-40B4-BE49-F238E27FC236}">
-                <a16:creationId xmlns:a16="http://schemas.microsoft.com/office/drawing/2014/main" id="{398991BC-29A5-4182-BD83-9D99D28894AA}"/>
+          <p:cNvPr id="6" name="フッター プレースホルダー 5">
+            <a:extLst>
+              <a:ext uri="{FF2B5EF4-FFF2-40B4-BE49-F238E27FC236}">
+                <a16:creationId xmlns:a16="http://schemas.microsoft.com/office/drawing/2014/main" id="{D210B217-9F24-5836-4201-262521043452}"/>
               </a:ext>
             </a:extLst>
           </p:cNvPr>
@@ -2794,19 +3013,20 @@
           <a:lstStyle/>
           <a:p>
             <a:r>
-              <a:rPr lang="en-US" dirty="0"/>
+              <a:rPr lang="en-US"/>
               <a:t>
               </a:t>
             </a:r>
-          </a:p>
-        </p:txBody>
-      </p:sp>
-      <p:sp>
-        <p:nvSpPr>
-          <p:cNvPr id="7" name="Slide Number Placeholder 6">
-            <a:extLst>
-              <a:ext uri="{FF2B5EF4-FFF2-40B4-BE49-F238E27FC236}">
-                <a16:creationId xmlns:a16="http://schemas.microsoft.com/office/drawing/2014/main" id="{5EC1C78F-6633-4604-8832-8E9D2DC768BB}"/>
+            <a:endParaRPr lang="en-US" dirty="0"/>
+          </a:p>
+        </p:txBody>
+      </p:sp>
+      <p:sp>
+        <p:nvSpPr>
+          <p:cNvPr id="7" name="スライド番号プレースホルダー 6">
+            <a:extLst>
+              <a:ext uri="{FF2B5EF4-FFF2-40B4-BE49-F238E27FC236}">
+                <a16:creationId xmlns:a16="http://schemas.microsoft.com/office/drawing/2014/main" id="{742B6CC1-F38E-41A3-5426-8B0A89F0D58C}"/>
               </a:ext>
             </a:extLst>
           </p:cNvPr>
@@ -2823,7 +3043,7 @@
           <a:lstStyle/>
           <a:p>
             <a:fld id="{017DE1FC-E54A-4B87-A814-263D1E8654B2}" type="slidenum">
-              <a:rPr lang="en-US" dirty="0"/>
+              <a:rPr lang="en-US" smtClean="0"/>
               <a:t>‹#›</a:t>
             </a:fld>
             <a:endParaRPr lang="en-US" dirty="0"/>
@@ -2833,13 +3053,14 @@
     </p:spTree>
     <p:extLst>
       <p:ext uri="{BB962C8B-B14F-4D97-AF65-F5344CB8AC3E}">
-        <p14:creationId xmlns:p14="http://schemas.microsoft.com/office/powerpoint/2010/main" val="2338429348"/>
+        <p14:creationId xmlns:p14="http://schemas.microsoft.com/office/powerpoint/2010/main" val="1275338286"/>
       </p:ext>
     </p:extLst>
   </p:cSld>
   <p:clrMapOvr>
     <a:masterClrMapping/>
   </p:clrMapOvr>
+  <p:hf hdr="0"/>
 </p:sldLayout>
 </file>
 
@@ -2867,122 +3088,10 @@
       </p:grpSpPr>
       <p:sp>
         <p:nvSpPr>
-          <p:cNvPr id="10" name="Rectangle 9">
-            <a:extLst>
-              <a:ext uri="{FF2B5EF4-FFF2-40B4-BE49-F238E27FC236}">
-                <a16:creationId xmlns:a16="http://schemas.microsoft.com/office/drawing/2014/main" id="{BD4C0BBB-0042-4603-A226-6117F3FD5B3C}"/>
-              </a:ext>
-            </a:extLst>
-          </p:cNvPr>
-          <p:cNvSpPr/>
-          <p:nvPr/>
-        </p:nvSpPr>
-        <p:spPr>
-          <a:xfrm rot="10800000" flipH="1">
-            <a:off x="0" y="6400799"/>
-            <a:ext cx="12192000" cy="456773"/>
-          </a:xfrm>
-          <a:prstGeom prst="rect">
-            <a:avLst/>
-          </a:prstGeom>
-          <a:gradFill>
-            <a:gsLst>
-              <a:gs pos="14000">
-                <a:schemeClr val="accent4">
-                  <a:alpha val="28000"/>
-                </a:schemeClr>
-              </a:gs>
-              <a:gs pos="100000">
-                <a:schemeClr val="accent5">
-                  <a:alpha val="85000"/>
-                </a:schemeClr>
-              </a:gs>
-            </a:gsLst>
-            <a:lin ang="6000000" scaled="0"/>
-          </a:gradFill>
-          <a:ln>
-            <a:noFill/>
-          </a:ln>
-        </p:spPr>
-        <p:style>
-          <a:lnRef idx="2">
-            <a:schemeClr val="accent1">
-              <a:shade val="50000"/>
-            </a:schemeClr>
-          </a:lnRef>
-          <a:fillRef idx="1">
-            <a:schemeClr val="accent1"/>
-          </a:fillRef>
-          <a:effectRef idx="0">
-            <a:schemeClr val="accent1"/>
-          </a:effectRef>
-          <a:fontRef idx="minor">
-            <a:schemeClr val="lt1"/>
-          </a:fontRef>
-        </p:style>
-      </p:sp>
-      <p:sp>
-        <p:nvSpPr>
-          <p:cNvPr id="11" name="Rectangle 10">
-            <a:extLst>
-              <a:ext uri="{FF2B5EF4-FFF2-40B4-BE49-F238E27FC236}">
-                <a16:creationId xmlns:a16="http://schemas.microsoft.com/office/drawing/2014/main" id="{EC44F520-2598-460E-9F91-B02F60830CA2}"/>
-              </a:ext>
-            </a:extLst>
-          </p:cNvPr>
-          <p:cNvSpPr/>
-          <p:nvPr/>
-        </p:nvSpPr>
-        <p:spPr>
-          <a:xfrm flipH="1">
-            <a:off x="4038600" y="6400799"/>
-            <a:ext cx="8153398" cy="456772"/>
-          </a:xfrm>
-          <a:prstGeom prst="rect">
-            <a:avLst/>
-          </a:prstGeom>
-          <a:gradFill>
-            <a:gsLst>
-              <a:gs pos="9000">
-                <a:schemeClr val="accent2">
-                  <a:lumMod val="60000"/>
-                  <a:lumOff val="40000"/>
-                  <a:alpha val="55000"/>
-                </a:schemeClr>
-              </a:gs>
-              <a:gs pos="99000">
-                <a:schemeClr val="accent2"/>
-              </a:gs>
-            </a:gsLst>
-            <a:lin ang="14400000" scaled="0"/>
-          </a:gradFill>
-          <a:ln>
-            <a:noFill/>
-          </a:ln>
-        </p:spPr>
-        <p:style>
-          <a:lnRef idx="2">
-            <a:schemeClr val="accent1">
-              <a:shade val="50000"/>
-            </a:schemeClr>
-          </a:lnRef>
-          <a:fillRef idx="1">
-            <a:schemeClr val="accent1"/>
-          </a:fillRef>
-          <a:effectRef idx="0">
-            <a:schemeClr val="accent1"/>
-          </a:effectRef>
-          <a:fontRef idx="minor">
-            <a:schemeClr val="lt1"/>
-          </a:fontRef>
-        </p:style>
-      </p:sp>
-      <p:sp>
-        <p:nvSpPr>
-          <p:cNvPr id="2" name="Title Placeholder 1">
-            <a:extLst>
-              <a:ext uri="{FF2B5EF4-FFF2-40B4-BE49-F238E27FC236}">
-                <a16:creationId xmlns:a16="http://schemas.microsoft.com/office/drawing/2014/main" id="{AD478F2F-4F04-4604-9005-BF0CB1142512}"/>
+          <p:cNvPr id="2" name="タイトル プレースホルダー 1">
+            <a:extLst>
+              <a:ext uri="{FF2B5EF4-FFF2-40B4-BE49-F238E27FC236}">
+                <a16:creationId xmlns:a16="http://schemas.microsoft.com/office/drawing/2014/main" id="{7C548EAC-767D-8742-CF62-78D51532F7C8}"/>
               </a:ext>
             </a:extLst>
           </p:cNvPr>
@@ -2995,32 +3104,32 @@
         </p:nvSpPr>
         <p:spPr>
           <a:xfrm>
-            <a:off x="1371600" y="361666"/>
-            <a:ext cx="9810376" cy="1659404"/>
+            <a:off x="838200" y="365125"/>
+            <a:ext cx="10515600" cy="1325563"/>
           </a:xfrm>
           <a:prstGeom prst="rect">
             <a:avLst/>
           </a:prstGeom>
         </p:spPr>
         <p:txBody>
-          <a:bodyPr vert="horz" lIns="0" tIns="0" rIns="0" bIns="0" rtlCol="0" anchor="b">
+          <a:bodyPr vert="horz" lIns="91440" tIns="45720" rIns="91440" bIns="45720" rtlCol="0" anchor="ctr">
             <a:normAutofit/>
           </a:bodyPr>
           <a:lstStyle/>
           <a:p>
             <a:r>
-              <a:rPr lang="en-US" dirty="0"/>
-              <a:t>Click to edit Master title style</a:t>
-            </a:r>
-          </a:p>
-        </p:txBody>
-      </p:sp>
-      <p:sp>
-        <p:nvSpPr>
-          <p:cNvPr id="3" name="Text Placeholder 2">
-            <a:extLst>
-              <a:ext uri="{FF2B5EF4-FFF2-40B4-BE49-F238E27FC236}">
-                <a16:creationId xmlns:a16="http://schemas.microsoft.com/office/drawing/2014/main" id="{B54A17D2-52AF-4B40-80A8-3E0DB855F297}"/>
+              <a:rPr kumimoji="1" lang="ja-JP" altLang="en-US"/>
+              <a:t>マスター タイトルの書式設定</a:t>
+            </a:r>
+          </a:p>
+        </p:txBody>
+      </p:sp>
+      <p:sp>
+        <p:nvSpPr>
+          <p:cNvPr id="3" name="テキスト プレースホルダー 2">
+            <a:extLst>
+              <a:ext uri="{FF2B5EF4-FFF2-40B4-BE49-F238E27FC236}">
+                <a16:creationId xmlns:a16="http://schemas.microsoft.com/office/drawing/2014/main" id="{3AC3F87B-145E-8D3B-3101-614228050F30}"/>
               </a:ext>
             </a:extLst>
           </p:cNvPr>
@@ -3033,61 +3142,93 @@
         </p:nvSpPr>
         <p:spPr>
           <a:xfrm>
-            <a:off x="1371600" y="2286000"/>
-            <a:ext cx="9810376" cy="3857811"/>
+            <a:off x="838200" y="1825625"/>
+            <a:ext cx="10515600" cy="4351338"/>
           </a:xfrm>
           <a:prstGeom prst="rect">
             <a:avLst/>
           </a:prstGeom>
         </p:spPr>
         <p:txBody>
-          <a:bodyPr vert="horz" lIns="0" tIns="0" rIns="0" bIns="0" rtlCol="0">
+          <a:bodyPr vert="horz" lIns="91440" tIns="45720" rIns="91440" bIns="45720" rtlCol="0">
             <a:normAutofit/>
           </a:bodyPr>
           <a:lstStyle/>
           <a:p>
             <a:pPr lvl="0"/>
             <a:r>
-              <a:rPr lang="en-US" dirty="0"/>
-              <a:t>Click to edit Master text styles</a:t>
+              <a:rPr kumimoji="1" lang="ja-JP" altLang="en-US"/>
+              <a:t>マスター テキストの書式設定</a:t>
             </a:r>
           </a:p>
           <a:p>
             <a:pPr lvl="1"/>
             <a:r>
-              <a:rPr lang="en-US" dirty="0"/>
-              <a:t>Second level</a:t>
+              <a:rPr kumimoji="1" lang="ja-JP" altLang="en-US"/>
+              <a:t>第 </a:t>
+            </a:r>
+            <a:r>
+              <a:rPr kumimoji="1" lang="en-US" altLang="ja-JP"/>
+              <a:t>2 </a:t>
+            </a:r>
+            <a:r>
+              <a:rPr kumimoji="1" lang="ja-JP" altLang="en-US"/>
+              <a:t>レベル</a:t>
             </a:r>
           </a:p>
           <a:p>
             <a:pPr lvl="2"/>
             <a:r>
-              <a:rPr lang="en-US" dirty="0"/>
-              <a:t>Third level</a:t>
+              <a:rPr kumimoji="1" lang="ja-JP" altLang="en-US"/>
+              <a:t>第 </a:t>
+            </a:r>
+            <a:r>
+              <a:rPr kumimoji="1" lang="en-US" altLang="ja-JP"/>
+              <a:t>3 </a:t>
+            </a:r>
+            <a:r>
+              <a:rPr kumimoji="1" lang="ja-JP" altLang="en-US"/>
+              <a:t>レベル</a:t>
             </a:r>
           </a:p>
           <a:p>
             <a:pPr lvl="3"/>
             <a:r>
-              <a:rPr lang="en-US" dirty="0"/>
-              <a:t>Fourth level</a:t>
+              <a:rPr kumimoji="1" lang="ja-JP" altLang="en-US"/>
+              <a:t>第 </a:t>
+            </a:r>
+            <a:r>
+              <a:rPr kumimoji="1" lang="en-US" altLang="ja-JP"/>
+              <a:t>4 </a:t>
+            </a:r>
+            <a:r>
+              <a:rPr kumimoji="1" lang="ja-JP" altLang="en-US"/>
+              <a:t>レベル</a:t>
             </a:r>
           </a:p>
           <a:p>
             <a:pPr lvl="4"/>
             <a:r>
-              <a:rPr lang="en-US" dirty="0"/>
-              <a:t>Fifth level</a:t>
-            </a:r>
-          </a:p>
-        </p:txBody>
-      </p:sp>
-      <p:sp>
-        <p:nvSpPr>
-          <p:cNvPr id="4" name="Date Placeholder 3">
-            <a:extLst>
-              <a:ext uri="{FF2B5EF4-FFF2-40B4-BE49-F238E27FC236}">
-                <a16:creationId xmlns:a16="http://schemas.microsoft.com/office/drawing/2014/main" id="{F592E0AA-D5B3-4BCF-BA69-209D9B335A06}"/>
+              <a:rPr kumimoji="1" lang="ja-JP" altLang="en-US"/>
+              <a:t>第 </a:t>
+            </a:r>
+            <a:r>
+              <a:rPr kumimoji="1" lang="en-US" altLang="ja-JP"/>
+              <a:t>5 </a:t>
+            </a:r>
+            <a:r>
+              <a:rPr kumimoji="1" lang="ja-JP" altLang="en-US"/>
+              <a:t>レベル</a:t>
+            </a:r>
+          </a:p>
+        </p:txBody>
+      </p:sp>
+      <p:sp>
+        <p:nvSpPr>
+          <p:cNvPr id="4" name="日付プレースホルダー 3">
+            <a:extLst>
+              <a:ext uri="{FF2B5EF4-FFF2-40B4-BE49-F238E27FC236}">
+                <a16:creationId xmlns:a16="http://schemas.microsoft.com/office/drawing/2014/main" id="{F267BDF9-E0EF-3A8C-4248-565CECC7DF30}"/>
               </a:ext>
             </a:extLst>
           </p:cNvPr>
@@ -3100,8 +3241,8 @@
         </p:nvSpPr>
         <p:spPr>
           <a:xfrm>
-            <a:off x="7910111" y="6409170"/>
-            <a:ext cx="3702392" cy="448830"/>
+            <a:off x="838200" y="6356350"/>
+            <a:ext cx="2743200" cy="365125"/>
           </a:xfrm>
           <a:prstGeom prst="rect">
             <a:avLst/>
@@ -3110,17 +3251,19 @@
         <p:txBody>
           <a:bodyPr vert="horz" lIns="91440" tIns="45720" rIns="91440" bIns="45720" rtlCol="0" anchor="ctr"/>
           <a:lstStyle>
-            <a:lvl1pPr algn="r">
-              <a:defRPr sz="800" cap="all" spc="300" baseline="0">
+            <a:lvl1pPr algn="l">
+              <a:defRPr sz="1200">
                 <a:solidFill>
-                  <a:schemeClr val="bg1"/>
+                  <a:schemeClr val="tx1">
+                    <a:tint val="82000"/>
+                  </a:schemeClr>
                 </a:solidFill>
               </a:defRPr>
             </a:lvl1pPr>
           </a:lstStyle>
           <a:p>
             <a:fld id="{149C728D-416F-40D5-8F13-55E5DD1CE8D1}" type="datetimeFigureOut">
-              <a:rPr lang="en-US" dirty="0"/>
+              <a:rPr lang="en-US" smtClean="0"/>
               <a:t>6/29/25</a:t>
             </a:fld>
             <a:endParaRPr lang="en-US" dirty="0"/>
@@ -3129,10 +3272,10 @@
       </p:sp>
       <p:sp>
         <p:nvSpPr>
-          <p:cNvPr id="5" name="Footer Placeholder 4">
-            <a:extLst>
-              <a:ext uri="{FF2B5EF4-FFF2-40B4-BE49-F238E27FC236}">
-                <a16:creationId xmlns:a16="http://schemas.microsoft.com/office/drawing/2014/main" id="{5F10A637-D86F-4FA1-985D-2D82456511B1}"/>
+          <p:cNvPr id="5" name="フッター プレースホルダー 4">
+            <a:extLst>
+              <a:ext uri="{FF2B5EF4-FFF2-40B4-BE49-F238E27FC236}">
+                <a16:creationId xmlns:a16="http://schemas.microsoft.com/office/drawing/2014/main" id="{F7D1C4F4-14B7-022A-C4B4-C3035858FFC3}"/>
               </a:ext>
             </a:extLst>
           </p:cNvPr>
@@ -3144,9 +3287,9 @@
           </p:nvPr>
         </p:nvSpPr>
         <p:spPr>
-          <a:xfrm rot="5400000">
-            <a:off x="-1828801" y="1912217"/>
-            <a:ext cx="4114800" cy="457200"/>
+          <a:xfrm>
+            <a:off x="4038600" y="6356350"/>
+            <a:ext cx="4114800" cy="365125"/>
           </a:xfrm>
           <a:prstGeom prst="rect">
             <a:avLst/>
@@ -3155,30 +3298,32 @@
         <p:txBody>
           <a:bodyPr vert="horz" lIns="91440" tIns="45720" rIns="91440" bIns="45720" rtlCol="0" anchor="ctr"/>
           <a:lstStyle>
-            <a:lvl1pPr algn="l">
-              <a:defRPr sz="800" b="1">
+            <a:lvl1pPr algn="ctr">
+              <a:defRPr sz="1200">
                 <a:solidFill>
-                  <a:schemeClr val="tx1"/>
+                  <a:schemeClr val="tx1">
+                    <a:tint val="82000"/>
+                  </a:schemeClr>
                 </a:solidFill>
-                <a:latin typeface="+mj-lt"/>
               </a:defRPr>
             </a:lvl1pPr>
           </a:lstStyle>
           <a:p>
             <a:r>
-              <a:rPr lang="en-US" dirty="0"/>
+              <a:rPr lang="en-US"/>
               <a:t>
               </a:t>
             </a:r>
-          </a:p>
-        </p:txBody>
-      </p:sp>
-      <p:sp>
-        <p:nvSpPr>
-          <p:cNvPr id="6" name="Slide Number Placeholder 5">
-            <a:extLst>
-              <a:ext uri="{FF2B5EF4-FFF2-40B4-BE49-F238E27FC236}">
-                <a16:creationId xmlns:a16="http://schemas.microsoft.com/office/drawing/2014/main" id="{80F2FA4D-A931-46BA-B767-29A6FD5AAD2A}"/>
+            <a:endParaRPr lang="en-US" dirty="0"/>
+          </a:p>
+        </p:txBody>
+      </p:sp>
+      <p:sp>
+        <p:nvSpPr>
+          <p:cNvPr id="6" name="スライド番号プレースホルダー 5">
+            <a:extLst>
+              <a:ext uri="{FF2B5EF4-FFF2-40B4-BE49-F238E27FC236}">
+                <a16:creationId xmlns:a16="http://schemas.microsoft.com/office/drawing/2014/main" id="{1BE50848-3BCE-CD4F-700C-5B2FC8D0F540}"/>
               </a:ext>
             </a:extLst>
           </p:cNvPr>
@@ -3191,8 +3336,8 @@
         </p:nvSpPr>
         <p:spPr>
           <a:xfrm>
-            <a:off x="11669678" y="6408742"/>
-            <a:ext cx="438652" cy="448830"/>
+            <a:off x="8610600" y="6356350"/>
+            <a:ext cx="2743200" cy="365125"/>
           </a:xfrm>
           <a:prstGeom prst="rect">
             <a:avLst/>
@@ -3202,16 +3347,18 @@
           <a:bodyPr vert="horz" lIns="91440" tIns="45720" rIns="91440" bIns="45720" rtlCol="0" anchor="ctr"/>
           <a:lstStyle>
             <a:lvl1pPr algn="r">
-              <a:defRPr sz="800">
+              <a:defRPr sz="1200">
                 <a:solidFill>
-                  <a:schemeClr val="bg1"/>
+                  <a:schemeClr val="tx1">
+                    <a:tint val="82000"/>
+                  </a:schemeClr>
                 </a:solidFill>
               </a:defRPr>
             </a:lvl1pPr>
           </a:lstStyle>
           <a:p>
             <a:fld id="{017DE1FC-E54A-4B87-A814-263D1E8654B2}" type="slidenum">
-              <a:rPr lang="en-US" dirty="0"/>
+              <a:rPr lang="en-US" smtClean="0"/>
               <a:t>‹#›</a:t>
             </a:fld>
             <a:endParaRPr lang="en-US" dirty="0"/>
@@ -3221,36 +3368,36 @@
     </p:spTree>
     <p:extLst>
       <p:ext uri="{BB962C8B-B14F-4D97-AF65-F5344CB8AC3E}">
-        <p14:creationId xmlns:p14="http://schemas.microsoft.com/office/powerpoint/2010/main" val="3997503646"/>
+        <p14:creationId xmlns:p14="http://schemas.microsoft.com/office/powerpoint/2010/main" val="260897102"/>
       </p:ext>
     </p:extLst>
   </p:cSld>
   <p:clrMap bg1="lt1" tx1="dk1" bg2="lt2" tx2="dk2" accent1="accent1" accent2="accent2" accent3="accent3" accent4="accent4" accent5="accent5" accent6="accent6" hlink="hlink" folHlink="folHlink"/>
   <p:sldLayoutIdLst>
-    <p:sldLayoutId id="2147483661" r:id="rId1"/>
-    <p:sldLayoutId id="2147483662" r:id="rId2"/>
-    <p:sldLayoutId id="2147483663" r:id="rId3"/>
-    <p:sldLayoutId id="2147483664" r:id="rId4"/>
-    <p:sldLayoutId id="2147483665" r:id="rId5"/>
-    <p:sldLayoutId id="2147483666" r:id="rId6"/>
-    <p:sldLayoutId id="2147483667" r:id="rId7"/>
-    <p:sldLayoutId id="2147483668" r:id="rId8"/>
-    <p:sldLayoutId id="2147483669" r:id="rId9"/>
-    <p:sldLayoutId id="2147483670" r:id="rId10"/>
-    <p:sldLayoutId id="2147483671" r:id="rId11"/>
+    <p:sldLayoutId id="2147483673" r:id="rId1"/>
+    <p:sldLayoutId id="2147483674" r:id="rId2"/>
+    <p:sldLayoutId id="2147483675" r:id="rId3"/>
+    <p:sldLayoutId id="2147483676" r:id="rId4"/>
+    <p:sldLayoutId id="2147483677" r:id="rId5"/>
+    <p:sldLayoutId id="2147483678" r:id="rId6"/>
+    <p:sldLayoutId id="2147483679" r:id="rId7"/>
+    <p:sldLayoutId id="2147483680" r:id="rId8"/>
+    <p:sldLayoutId id="2147483681" r:id="rId9"/>
+    <p:sldLayoutId id="2147483682" r:id="rId10"/>
+    <p:sldLayoutId id="2147483683" r:id="rId11"/>
   </p:sldLayoutIdLst>
   <p:hf hdr="0"/>
   <p:txStyles>
     <p:titleStyle>
       <a:lvl1pPr algn="l" defTabSz="914400" rtl="0" eaLnBrk="1" latinLnBrk="0" hangingPunct="1">
         <a:lnSpc>
-          <a:spcPct val="100000"/>
+          <a:spcPct val="90000"/>
         </a:lnSpc>
         <a:spcBef>
           <a:spcPct val="0"/>
         </a:spcBef>
         <a:buNone/>
-        <a:defRPr sz="3600" b="1" i="0" kern="1200" cap="all" spc="700" baseline="0">
+        <a:defRPr kumimoji="1" sz="4400" kern="1200">
           <a:solidFill>
             <a:schemeClr val="tx1"/>
           </a:solidFill>
@@ -3263,14 +3410,14 @@
     <p:bodyStyle>
       <a:lvl1pPr marL="228600" indent="-228600" algn="l" defTabSz="914400" rtl="0" eaLnBrk="1" latinLnBrk="0" hangingPunct="1">
         <a:lnSpc>
-          <a:spcPct val="120000"/>
+          <a:spcPct val="90000"/>
         </a:lnSpc>
         <a:spcBef>
           <a:spcPts val="1000"/>
         </a:spcBef>
         <a:buFont typeface="Arial" panose="020B0604020202020204" pitchFamily="34" charset="0"/>
         <a:buChar char="•"/>
-        <a:defRPr sz="2000" kern="1200">
+        <a:defRPr kumimoji="1" sz="2800" kern="1200">
           <a:solidFill>
             <a:schemeClr val="tx1"/>
           </a:solidFill>
@@ -3281,14 +3428,14 @@
       </a:lvl1pPr>
       <a:lvl2pPr marL="685800" indent="-228600" algn="l" defTabSz="914400" rtl="0" eaLnBrk="1" latinLnBrk="0" hangingPunct="1">
         <a:lnSpc>
-          <a:spcPct val="120000"/>
+          <a:spcPct val="90000"/>
         </a:lnSpc>
         <a:spcBef>
           <a:spcPts val="500"/>
         </a:spcBef>
         <a:buFont typeface="Arial" panose="020B0604020202020204" pitchFamily="34" charset="0"/>
         <a:buChar char="•"/>
-        <a:defRPr sz="2000" kern="1200">
+        <a:defRPr kumimoji="1" sz="2400" kern="1200">
           <a:solidFill>
             <a:schemeClr val="tx1"/>
           </a:solidFill>
@@ -3299,14 +3446,14 @@
       </a:lvl2pPr>
       <a:lvl3pPr marL="1143000" indent="-228600" algn="l" defTabSz="914400" rtl="0" eaLnBrk="1" latinLnBrk="0" hangingPunct="1">
         <a:lnSpc>
-          <a:spcPct val="120000"/>
+          <a:spcPct val="90000"/>
         </a:lnSpc>
         <a:spcBef>
           <a:spcPts val="500"/>
         </a:spcBef>
         <a:buFont typeface="Arial" panose="020B0604020202020204" pitchFamily="34" charset="0"/>
         <a:buChar char="•"/>
-        <a:defRPr sz="1800" kern="1200">
+        <a:defRPr kumimoji="1" sz="2000" kern="1200">
           <a:solidFill>
             <a:schemeClr val="tx1"/>
           </a:solidFill>
@@ -3317,14 +3464,14 @@
       </a:lvl3pPr>
       <a:lvl4pPr marL="1600200" indent="-228600" algn="l" defTabSz="914400" rtl="0" eaLnBrk="1" latinLnBrk="0" hangingPunct="1">
         <a:lnSpc>
-          <a:spcPct val="120000"/>
+          <a:spcPct val="90000"/>
         </a:lnSpc>
         <a:spcBef>
           <a:spcPts val="500"/>
         </a:spcBef>
         <a:buFont typeface="Arial" panose="020B0604020202020204" pitchFamily="34" charset="0"/>
         <a:buChar char="•"/>
-        <a:defRPr sz="1600" kern="1200">
+        <a:defRPr kumimoji="1" sz="1800" kern="1200">
           <a:solidFill>
             <a:schemeClr val="tx1"/>
           </a:solidFill>
@@ -3335,14 +3482,14 @@
       </a:lvl4pPr>
       <a:lvl5pPr marL="2057400" indent="-228600" algn="l" defTabSz="914400" rtl="0" eaLnBrk="1" latinLnBrk="0" hangingPunct="1">
         <a:lnSpc>
-          <a:spcPct val="120000"/>
+          <a:spcPct val="90000"/>
         </a:lnSpc>
         <a:spcBef>
           <a:spcPts val="500"/>
         </a:spcBef>
         <a:buFont typeface="Arial" panose="020B0604020202020204" pitchFamily="34" charset="0"/>
         <a:buChar char="•"/>
-        <a:defRPr sz="1600" kern="1200">
+        <a:defRPr kumimoji="1" sz="1800" kern="1200">
           <a:solidFill>
             <a:schemeClr val="tx1"/>
           </a:solidFill>
@@ -3360,7 +3507,7 @@
         </a:spcBef>
         <a:buFont typeface="Arial" panose="020B0604020202020204" pitchFamily="34" charset="0"/>
         <a:buChar char="•"/>
-        <a:defRPr sz="1800" kern="1200">
+        <a:defRPr kumimoji="1" sz="1800" kern="1200">
           <a:solidFill>
             <a:schemeClr val="tx1"/>
           </a:solidFill>
@@ -3378,7 +3525,7 @@
         </a:spcBef>
         <a:buFont typeface="Arial" panose="020B0604020202020204" pitchFamily="34" charset="0"/>
         <a:buChar char="•"/>
-        <a:defRPr sz="1800" kern="1200">
+        <a:defRPr kumimoji="1" sz="1800" kern="1200">
           <a:solidFill>
             <a:schemeClr val="tx1"/>
           </a:solidFill>
@@ -3396,7 +3543,7 @@
         </a:spcBef>
         <a:buFont typeface="Arial" panose="020B0604020202020204" pitchFamily="34" charset="0"/>
         <a:buChar char="•"/>
-        <a:defRPr sz="1800" kern="1200">
+        <a:defRPr kumimoji="1" sz="1800" kern="1200">
           <a:solidFill>
             <a:schemeClr val="tx1"/>
           </a:solidFill>
@@ -3414,7 +3561,7 @@
         </a:spcBef>
         <a:buFont typeface="Arial" panose="020B0604020202020204" pitchFamily="34" charset="0"/>
         <a:buChar char="•"/>
-        <a:defRPr sz="1800" kern="1200">
+        <a:defRPr kumimoji="1" sz="1800" kern="1200">
           <a:solidFill>
             <a:schemeClr val="tx1"/>
           </a:solidFill>
@@ -3426,10 +3573,10 @@
     </p:bodyStyle>
     <p:otherStyle>
       <a:defPPr>
-        <a:defRPr lang="en-US"/>
+        <a:defRPr lang="ja-JP"/>
       </a:defPPr>
       <a:lvl1pPr marL="0" algn="l" defTabSz="914400" rtl="0" eaLnBrk="1" latinLnBrk="0" hangingPunct="1">
-        <a:defRPr sz="1800" kern="1200">
+        <a:defRPr kumimoji="1" sz="1800" kern="1200">
           <a:solidFill>
             <a:schemeClr val="tx1"/>
           </a:solidFill>
@@ -3439,7 +3586,7 @@
         </a:defRPr>
       </a:lvl1pPr>
       <a:lvl2pPr marL="457200" algn="l" defTabSz="914400" rtl="0" eaLnBrk="1" latinLnBrk="0" hangingPunct="1">
-        <a:defRPr sz="1800" kern="1200">
+        <a:defRPr kumimoji="1" sz="1800" kern="1200">
           <a:solidFill>
             <a:schemeClr val="tx1"/>
           </a:solidFill>
@@ -3449,7 +3596,7 @@
         </a:defRPr>
       </a:lvl2pPr>
       <a:lvl3pPr marL="914400" algn="l" defTabSz="914400" rtl="0" eaLnBrk="1" latinLnBrk="0" hangingPunct="1">
-        <a:defRPr sz="1800" kern="1200">
+        <a:defRPr kumimoji="1" sz="1800" kern="1200">
           <a:solidFill>
             <a:schemeClr val="tx1"/>
           </a:solidFill>
@@ -3459,7 +3606,7 @@
         </a:defRPr>
       </a:lvl3pPr>
       <a:lvl4pPr marL="1371600" algn="l" defTabSz="914400" rtl="0" eaLnBrk="1" latinLnBrk="0" hangingPunct="1">
-        <a:defRPr sz="1800" kern="1200">
+        <a:defRPr kumimoji="1" sz="1800" kern="1200">
           <a:solidFill>
             <a:schemeClr val="tx1"/>
           </a:solidFill>
@@ -3469,7 +3616,7 @@
         </a:defRPr>
       </a:lvl4pPr>
       <a:lvl5pPr marL="1828800" algn="l" defTabSz="914400" rtl="0" eaLnBrk="1" latinLnBrk="0" hangingPunct="1">
-        <a:defRPr sz="1800" kern="1200">
+        <a:defRPr kumimoji="1" sz="1800" kern="1200">
           <a:solidFill>
             <a:schemeClr val="tx1"/>
           </a:solidFill>
@@ -3479,7 +3626,7 @@
         </a:defRPr>
       </a:lvl5pPr>
       <a:lvl6pPr marL="2286000" algn="l" defTabSz="914400" rtl="0" eaLnBrk="1" latinLnBrk="0" hangingPunct="1">
-        <a:defRPr sz="1800" kern="1200">
+        <a:defRPr kumimoji="1" sz="1800" kern="1200">
           <a:solidFill>
             <a:schemeClr val="tx1"/>
           </a:solidFill>
@@ -3489,7 +3636,7 @@
         </a:defRPr>
       </a:lvl6pPr>
       <a:lvl7pPr marL="2743200" algn="l" defTabSz="914400" rtl="0" eaLnBrk="1" latinLnBrk="0" hangingPunct="1">
-        <a:defRPr sz="1800" kern="1200">
+        <a:defRPr kumimoji="1" sz="1800" kern="1200">
           <a:solidFill>
             <a:schemeClr val="tx1"/>
           </a:solidFill>
@@ -3499,7 +3646,7 @@
         </a:defRPr>
       </a:lvl7pPr>
       <a:lvl8pPr marL="3200400" algn="l" defTabSz="914400" rtl="0" eaLnBrk="1" latinLnBrk="0" hangingPunct="1">
-        <a:defRPr sz="1800" kern="1200">
+        <a:defRPr kumimoji="1" sz="1800" kern="1200">
           <a:solidFill>
             <a:schemeClr val="tx1"/>
           </a:solidFill>
@@ -3509,7 +3656,7 @@
         </a:defRPr>
       </a:lvl8pPr>
       <a:lvl9pPr marL="3657600" algn="l" defTabSz="914400" rtl="0" eaLnBrk="1" latinLnBrk="0" hangingPunct="1">
-        <a:defRPr sz="1800" kern="1200">
+        <a:defRPr kumimoji="1" sz="1800" kern="1200">
           <a:solidFill>
             <a:schemeClr val="tx1"/>
           </a:solidFill>
@@ -3522,63 +3669,7 @@
   </p:txStyles>
   <p:extLst>
     <p:ext uri="{27BBF7A9-308A-43DC-89C8-2F10F3537804}">
-      <p15:sldGuideLst xmlns:p15="http://schemas.microsoft.com/office/powerpoint/2012/main">
-        <p15:guide id="1" orient="horz" pos="2160">
-          <p15:clr>
-            <a:srgbClr val="F26B43"/>
-          </p15:clr>
-        </p15:guide>
-        <p15:guide id="2" pos="3840">
-          <p15:clr>
-            <a:srgbClr val="F26B43"/>
-          </p15:clr>
-        </p15:guide>
-        <p15:guide id="3" orient="horz" pos="288">
-          <p15:clr>
-            <a:srgbClr val="F26B43"/>
-          </p15:clr>
-        </p15:guide>
-        <p15:guide id="4" pos="288">
-          <p15:clr>
-            <a:srgbClr val="F26B43"/>
-          </p15:clr>
-        </p15:guide>
-        <p15:guide id="5" orient="horz" pos="4032">
-          <p15:clr>
-            <a:srgbClr val="F26B43"/>
-          </p15:clr>
-        </p15:guide>
-        <p15:guide id="6" pos="7392">
-          <p15:clr>
-            <a:srgbClr val="F26B43"/>
-          </p15:clr>
-        </p15:guide>
-        <p15:guide id="7" pos="5112">
-          <p15:clr>
-            <a:srgbClr val="F26B43"/>
-          </p15:clr>
-        </p15:guide>
-        <p15:guide id="8" pos="2544">
-          <p15:clr>
-            <a:srgbClr val="F26B43"/>
-          </p15:clr>
-        </p15:guide>
-        <p15:guide id="9" pos="864">
-          <p15:clr>
-            <a:srgbClr val="F26B43"/>
-          </p15:clr>
-        </p15:guide>
-        <p15:guide id="10" orient="horz" pos="648">
-          <p15:clr>
-            <a:srgbClr val="F26B43"/>
-          </p15:clr>
-        </p15:guide>
-        <p15:guide id="11" pos="6816">
-          <p15:clr>
-            <a:srgbClr val="F26B43"/>
-          </p15:clr>
-        </p15:guide>
-      </p15:sldGuideLst>
+      <p15:sldGuideLst xmlns:p15="http://schemas.microsoft.com/office/powerpoint/2012/main"/>
     </p:ext>
   </p:extLst>
 </p:sldMaster>
@@ -4705,7 +4796,9 @@
           </a:xfrm>
         </p:spPr>
         <p:txBody>
-          <a:bodyPr/>
+          <a:bodyPr>
+            <a:normAutofit fontScale="90000"/>
+          </a:bodyPr>
           <a:lstStyle/>
           <a:p>
             <a:r>
@@ -9430,60 +9523,747 @@
 </p:sld>
 </file>
 
+<file path=ppt/slides/slide7.xml><?xml version="1.0" encoding="utf-8"?>
+<p:sld xmlns:a="http://schemas.openxmlformats.org/drawingml/2006/main" xmlns:r="http://schemas.openxmlformats.org/officeDocument/2006/relationships" xmlns:p="http://schemas.openxmlformats.org/presentationml/2006/main">
+  <p:cSld>
+    <p:spTree>
+      <p:nvGrpSpPr>
+        <p:cNvPr id="1" name=""/>
+        <p:cNvGrpSpPr/>
+        <p:nvPr/>
+      </p:nvGrpSpPr>
+      <p:grpSpPr>
+        <a:xfrm>
+          <a:off x="0" y="0"/>
+          <a:ext cx="0" cy="0"/>
+          <a:chOff x="0" y="0"/>
+          <a:chExt cx="0" cy="0"/>
+        </a:xfrm>
+      </p:grpSpPr>
+      <p:sp>
+        <p:nvSpPr>
+          <p:cNvPr id="4" name="フッター プレースホルダー 3">
+            <a:extLst>
+              <a:ext uri="{FF2B5EF4-FFF2-40B4-BE49-F238E27FC236}">
+                <a16:creationId xmlns:a16="http://schemas.microsoft.com/office/drawing/2014/main" id="{829E642F-998C-C7E1-4C67-D7B2E1DA3D7C}"/>
+              </a:ext>
+            </a:extLst>
+          </p:cNvPr>
+          <p:cNvSpPr>
+            <a:spLocks noGrp="1"/>
+          </p:cNvSpPr>
+          <p:nvPr>
+            <p:ph type="ftr" sz="quarter" idx="11"/>
+          </p:nvPr>
+        </p:nvSpPr>
+        <p:spPr/>
+        <p:txBody>
+          <a:bodyPr/>
+          <a:lstStyle/>
+          <a:p>
+            <a:r>
+              <a:rPr lang="en-US"/>
+              <a:t>
+              </a:t>
+            </a:r>
+            <a:endParaRPr lang="en-US" dirty="0"/>
+          </a:p>
+        </p:txBody>
+      </p:sp>
+      <p:pic>
+        <p:nvPicPr>
+          <p:cNvPr id="9" name="図 8" descr="電子機器の部品&#10;&#10;中程度の精度で自動的に生成された説明">
+            <a:extLst>
+              <a:ext uri="{FF2B5EF4-FFF2-40B4-BE49-F238E27FC236}">
+                <a16:creationId xmlns:a16="http://schemas.microsoft.com/office/drawing/2014/main" id="{6140DBF3-66EE-BFED-AE21-854C05691CAA}"/>
+              </a:ext>
+            </a:extLst>
+          </p:cNvPr>
+          <p:cNvPicPr>
+            <a:picLocks noChangeAspect="1"/>
+          </p:cNvPicPr>
+          <p:nvPr/>
+        </p:nvPicPr>
+        <p:blipFill>
+          <a:blip r:embed="rId2"/>
+          <a:stretch>
+            <a:fillRect/>
+          </a:stretch>
+        </p:blipFill>
+        <p:spPr>
+          <a:xfrm>
+            <a:off x="2093447" y="1193801"/>
+            <a:ext cx="2590800" cy="1943100"/>
+          </a:xfrm>
+          <a:prstGeom prst="rect">
+            <a:avLst/>
+          </a:prstGeom>
+        </p:spPr>
+      </p:pic>
+      <p:pic>
+        <p:nvPicPr>
+          <p:cNvPr id="10" name="図 9" descr="電子機器の部品&#10;&#10;中程度の精度で自動的に生成された説明">
+            <a:extLst>
+              <a:ext uri="{FF2B5EF4-FFF2-40B4-BE49-F238E27FC236}">
+                <a16:creationId xmlns:a16="http://schemas.microsoft.com/office/drawing/2014/main" id="{0ECDAD49-3A59-BCD6-3290-E5C9D38B9C8D}"/>
+              </a:ext>
+            </a:extLst>
+          </p:cNvPr>
+          <p:cNvPicPr>
+            <a:picLocks noChangeAspect="1"/>
+          </p:cNvPicPr>
+          <p:nvPr/>
+        </p:nvPicPr>
+        <p:blipFill>
+          <a:blip r:embed="rId2"/>
+          <a:stretch>
+            <a:fillRect/>
+          </a:stretch>
+        </p:blipFill>
+        <p:spPr>
+          <a:xfrm>
+            <a:off x="6921500" y="1193801"/>
+            <a:ext cx="2590800" cy="1943100"/>
+          </a:xfrm>
+          <a:prstGeom prst="rect">
+            <a:avLst/>
+          </a:prstGeom>
+        </p:spPr>
+      </p:pic>
+      <p:pic>
+        <p:nvPicPr>
+          <p:cNvPr id="20" name="図 19" descr="図形, 四角形&#10;&#10;中程度の精度で自動的に生成された説明">
+            <a:extLst>
+              <a:ext uri="{FF2B5EF4-FFF2-40B4-BE49-F238E27FC236}">
+                <a16:creationId xmlns:a16="http://schemas.microsoft.com/office/drawing/2014/main" id="{AECF654E-E2DA-44AB-7074-E4323ED97669}"/>
+              </a:ext>
+            </a:extLst>
+          </p:cNvPr>
+          <p:cNvPicPr>
+            <a:picLocks noChangeAspect="1"/>
+          </p:cNvPicPr>
+          <p:nvPr/>
+        </p:nvPicPr>
+        <p:blipFill>
+          <a:blip r:embed="rId3"/>
+          <a:stretch>
+            <a:fillRect/>
+          </a:stretch>
+        </p:blipFill>
+        <p:spPr>
+          <a:xfrm>
+            <a:off x="2707279" y="4494933"/>
+            <a:ext cx="1608668" cy="1562967"/>
+          </a:xfrm>
+          <a:prstGeom prst="rect">
+            <a:avLst/>
+          </a:prstGeom>
+        </p:spPr>
+      </p:pic>
+      <p:pic>
+        <p:nvPicPr>
+          <p:cNvPr id="22" name="図 21">
+            <a:extLst>
+              <a:ext uri="{FF2B5EF4-FFF2-40B4-BE49-F238E27FC236}">
+                <a16:creationId xmlns:a16="http://schemas.microsoft.com/office/drawing/2014/main" id="{75FCE63C-C29F-AA49-367C-741EE4CD4BD5}"/>
+              </a:ext>
+            </a:extLst>
+          </p:cNvPr>
+          <p:cNvPicPr>
+            <a:picLocks noChangeAspect="1"/>
+          </p:cNvPicPr>
+          <p:nvPr/>
+        </p:nvPicPr>
+        <p:blipFill>
+          <a:blip r:embed="rId4"/>
+          <a:stretch>
+            <a:fillRect/>
+          </a:stretch>
+        </p:blipFill>
+        <p:spPr>
+          <a:xfrm>
+            <a:off x="7531100" y="4368123"/>
+            <a:ext cx="1371600" cy="1689100"/>
+          </a:xfrm>
+          <a:prstGeom prst="rect">
+            <a:avLst/>
+          </a:prstGeom>
+        </p:spPr>
+      </p:pic>
+      <p:cxnSp>
+        <p:nvCxnSpPr>
+          <p:cNvPr id="24" name="直線矢印コネクタ 23">
+            <a:extLst>
+              <a:ext uri="{FF2B5EF4-FFF2-40B4-BE49-F238E27FC236}">
+                <a16:creationId xmlns:a16="http://schemas.microsoft.com/office/drawing/2014/main" id="{53FDA2A2-4353-31E8-C977-3B9801CAAFD0}"/>
+              </a:ext>
+            </a:extLst>
+          </p:cNvPr>
+          <p:cNvCxnSpPr/>
+          <p:nvPr/>
+        </p:nvCxnSpPr>
+        <p:spPr>
+          <a:xfrm>
+            <a:off x="3348694" y="3157494"/>
+            <a:ext cx="0" cy="1040723"/>
+          </a:xfrm>
+          <a:prstGeom prst="straightConnector1">
+            <a:avLst/>
+          </a:prstGeom>
+          <a:ln w="50800">
+            <a:solidFill>
+              <a:schemeClr val="tx1"/>
+            </a:solidFill>
+            <a:tailEnd type="triangle"/>
+          </a:ln>
+        </p:spPr>
+        <p:style>
+          <a:lnRef idx="1">
+            <a:schemeClr val="accent1"/>
+          </a:lnRef>
+          <a:fillRef idx="0">
+            <a:schemeClr val="accent1"/>
+          </a:fillRef>
+          <a:effectRef idx="0">
+            <a:schemeClr val="accent1"/>
+          </a:effectRef>
+          <a:fontRef idx="minor">
+            <a:schemeClr val="tx1"/>
+          </a:fontRef>
+        </p:style>
+      </p:cxnSp>
+      <p:cxnSp>
+        <p:nvCxnSpPr>
+          <p:cNvPr id="25" name="直線矢印コネクタ 24">
+            <a:extLst>
+              <a:ext uri="{FF2B5EF4-FFF2-40B4-BE49-F238E27FC236}">
+                <a16:creationId xmlns:a16="http://schemas.microsoft.com/office/drawing/2014/main" id="{79E94EDF-DCD5-F043-DF67-797E1B2AE030}"/>
+              </a:ext>
+            </a:extLst>
+          </p:cNvPr>
+          <p:cNvCxnSpPr>
+            <a:cxnSpLocks/>
+          </p:cNvCxnSpPr>
+          <p:nvPr/>
+        </p:nvCxnSpPr>
+        <p:spPr>
+          <a:xfrm>
+            <a:off x="5038222" y="5205646"/>
+            <a:ext cx="1785039" cy="0"/>
+          </a:xfrm>
+          <a:prstGeom prst="straightConnector1">
+            <a:avLst/>
+          </a:prstGeom>
+          <a:ln w="50800">
+            <a:solidFill>
+              <a:schemeClr val="tx1"/>
+            </a:solidFill>
+            <a:tailEnd type="triangle"/>
+          </a:ln>
+        </p:spPr>
+        <p:style>
+          <a:lnRef idx="1">
+            <a:schemeClr val="accent1"/>
+          </a:lnRef>
+          <a:fillRef idx="0">
+            <a:schemeClr val="accent1"/>
+          </a:fillRef>
+          <a:effectRef idx="0">
+            <a:schemeClr val="accent1"/>
+          </a:effectRef>
+          <a:fontRef idx="minor">
+            <a:schemeClr val="tx1"/>
+          </a:fontRef>
+        </p:style>
+      </p:cxnSp>
+      <p:cxnSp>
+        <p:nvCxnSpPr>
+          <p:cNvPr id="26" name="直線矢印コネクタ 25">
+            <a:extLst>
+              <a:ext uri="{FF2B5EF4-FFF2-40B4-BE49-F238E27FC236}">
+                <a16:creationId xmlns:a16="http://schemas.microsoft.com/office/drawing/2014/main" id="{062810D1-34AC-B115-8B29-8A87390991A6}"/>
+              </a:ext>
+            </a:extLst>
+          </p:cNvPr>
+          <p:cNvCxnSpPr>
+            <a:cxnSpLocks/>
+          </p:cNvCxnSpPr>
+          <p:nvPr/>
+        </p:nvCxnSpPr>
+        <p:spPr>
+          <a:xfrm rot="10800000">
+            <a:off x="8161994" y="3220994"/>
+            <a:ext cx="0" cy="1040723"/>
+          </a:xfrm>
+          <a:prstGeom prst="straightConnector1">
+            <a:avLst/>
+          </a:prstGeom>
+          <a:ln w="50800">
+            <a:solidFill>
+              <a:schemeClr val="tx1"/>
+            </a:solidFill>
+            <a:tailEnd type="triangle"/>
+          </a:ln>
+        </p:spPr>
+        <p:style>
+          <a:lnRef idx="1">
+            <a:schemeClr val="accent1"/>
+          </a:lnRef>
+          <a:fillRef idx="0">
+            <a:schemeClr val="accent1"/>
+          </a:fillRef>
+          <a:effectRef idx="0">
+            <a:schemeClr val="accent1"/>
+          </a:effectRef>
+          <a:fontRef idx="minor">
+            <a:schemeClr val="tx1"/>
+          </a:fontRef>
+        </p:style>
+      </p:cxnSp>
+      <p:sp>
+        <p:nvSpPr>
+          <p:cNvPr id="30" name="テキスト ボックス 29">
+            <a:extLst>
+              <a:ext uri="{FF2B5EF4-FFF2-40B4-BE49-F238E27FC236}">
+                <a16:creationId xmlns:a16="http://schemas.microsoft.com/office/drawing/2014/main" id="{99D02D61-1D10-11C4-2685-8A968E2C57F8}"/>
+              </a:ext>
+            </a:extLst>
+          </p:cNvPr>
+          <p:cNvSpPr txBox="1"/>
+          <p:nvPr/>
+        </p:nvSpPr>
+        <p:spPr>
+          <a:xfrm>
+            <a:off x="1018377" y="1264098"/>
+            <a:ext cx="2150140" cy="400110"/>
+          </a:xfrm>
+          <a:prstGeom prst="rect">
+            <a:avLst/>
+          </a:prstGeom>
+          <a:noFill/>
+        </p:spPr>
+        <p:txBody>
+          <a:bodyPr wrap="none" rtlCol="0">
+            <a:spAutoFit/>
+          </a:bodyPr>
+          <a:lstStyle/>
+          <a:p>
+            <a:r>
+              <a:rPr lang="en-US" altLang="ja-JP" sz="2000" dirty="0"/>
+              <a:t>Arduino</a:t>
+            </a:r>
+            <a:r>
+              <a:rPr lang="ja-JP" altLang="en-US" sz="2000"/>
+              <a:t>（送信）</a:t>
+            </a:r>
+            <a:endParaRPr kumimoji="1" lang="ja-JP" altLang="en-US" sz="2000"/>
+          </a:p>
+        </p:txBody>
+      </p:sp>
+      <p:sp>
+        <p:nvSpPr>
+          <p:cNvPr id="31" name="テキスト ボックス 30">
+            <a:extLst>
+              <a:ext uri="{FF2B5EF4-FFF2-40B4-BE49-F238E27FC236}">
+                <a16:creationId xmlns:a16="http://schemas.microsoft.com/office/drawing/2014/main" id="{6A96E46B-10C9-8CD6-4206-A2658345AE95}"/>
+              </a:ext>
+            </a:extLst>
+          </p:cNvPr>
+          <p:cNvSpPr txBox="1"/>
+          <p:nvPr/>
+        </p:nvSpPr>
+        <p:spPr>
+          <a:xfrm>
+            <a:off x="9023483" y="1193801"/>
+            <a:ext cx="2150140" cy="400110"/>
+          </a:xfrm>
+          <a:prstGeom prst="rect">
+            <a:avLst/>
+          </a:prstGeom>
+          <a:noFill/>
+        </p:spPr>
+        <p:txBody>
+          <a:bodyPr wrap="none" rtlCol="0">
+            <a:spAutoFit/>
+          </a:bodyPr>
+          <a:lstStyle/>
+          <a:p>
+            <a:r>
+              <a:rPr kumimoji="1" lang="en-US" altLang="ja-JP" sz="2000" dirty="0"/>
+              <a:t>Arduino</a:t>
+            </a:r>
+            <a:r>
+              <a:rPr kumimoji="1" lang="ja-JP" altLang="en-US" sz="2000"/>
+              <a:t>（受信）</a:t>
+            </a:r>
+          </a:p>
+        </p:txBody>
+      </p:sp>
+      <p:sp>
+        <p:nvSpPr>
+          <p:cNvPr id="32" name="テキスト ボックス 31">
+            <a:extLst>
+              <a:ext uri="{FF2B5EF4-FFF2-40B4-BE49-F238E27FC236}">
+                <a16:creationId xmlns:a16="http://schemas.microsoft.com/office/drawing/2014/main" id="{70B7A611-8912-AB16-CC1C-EE4272B590E1}"/>
+              </a:ext>
+            </a:extLst>
+          </p:cNvPr>
+          <p:cNvSpPr txBox="1"/>
+          <p:nvPr/>
+        </p:nvSpPr>
+        <p:spPr>
+          <a:xfrm>
+            <a:off x="9023483" y="5503225"/>
+            <a:ext cx="877163" cy="369332"/>
+          </a:xfrm>
+          <a:prstGeom prst="rect">
+            <a:avLst/>
+          </a:prstGeom>
+          <a:noFill/>
+        </p:spPr>
+        <p:txBody>
+          <a:bodyPr wrap="none" rtlCol="0">
+            <a:spAutoFit/>
+          </a:bodyPr>
+          <a:lstStyle/>
+          <a:p>
+            <a:r>
+              <a:rPr kumimoji="1" lang="ja-JP" altLang="en-US"/>
+              <a:t>マイク</a:t>
+            </a:r>
+          </a:p>
+        </p:txBody>
+      </p:sp>
+      <p:sp>
+        <p:nvSpPr>
+          <p:cNvPr id="33" name="テキスト ボックス 32">
+            <a:extLst>
+              <a:ext uri="{FF2B5EF4-FFF2-40B4-BE49-F238E27FC236}">
+                <a16:creationId xmlns:a16="http://schemas.microsoft.com/office/drawing/2014/main" id="{37A52B86-D98A-7630-D2EA-04AB84791559}"/>
+              </a:ext>
+            </a:extLst>
+          </p:cNvPr>
+          <p:cNvSpPr txBox="1"/>
+          <p:nvPr/>
+        </p:nvSpPr>
+        <p:spPr>
+          <a:xfrm>
+            <a:off x="1368451" y="5503225"/>
+            <a:ext cx="1338828" cy="369332"/>
+          </a:xfrm>
+          <a:prstGeom prst="rect">
+            <a:avLst/>
+          </a:prstGeom>
+          <a:noFill/>
+        </p:spPr>
+        <p:txBody>
+          <a:bodyPr wrap="none" rtlCol="0">
+            <a:spAutoFit/>
+          </a:bodyPr>
+          <a:lstStyle/>
+          <a:p>
+            <a:r>
+              <a:rPr kumimoji="1" lang="ja-JP" altLang="en-US"/>
+              <a:t>スピーカー</a:t>
+            </a:r>
+          </a:p>
+        </p:txBody>
+      </p:sp>
+      <p:sp>
+        <p:nvSpPr>
+          <p:cNvPr id="34" name="テキスト ボックス 33">
+            <a:extLst>
+              <a:ext uri="{FF2B5EF4-FFF2-40B4-BE49-F238E27FC236}">
+                <a16:creationId xmlns:a16="http://schemas.microsoft.com/office/drawing/2014/main" id="{CCB20650-74D9-CA93-FC68-DAAE423375C0}"/>
+              </a:ext>
+            </a:extLst>
+          </p:cNvPr>
+          <p:cNvSpPr txBox="1"/>
+          <p:nvPr/>
+        </p:nvSpPr>
+        <p:spPr>
+          <a:xfrm>
+            <a:off x="1374346" y="3317845"/>
+            <a:ext cx="1702710" cy="646331"/>
+          </a:xfrm>
+          <a:prstGeom prst="rect">
+            <a:avLst/>
+          </a:prstGeom>
+          <a:noFill/>
+        </p:spPr>
+        <p:txBody>
+          <a:bodyPr wrap="none" rtlCol="0">
+            <a:spAutoFit/>
+          </a:bodyPr>
+          <a:lstStyle/>
+          <a:p>
+            <a:r>
+              <a:rPr lang="en-US" altLang="ja-JP" dirty="0"/>
+              <a:t>4</a:t>
+            </a:r>
+            <a:r>
+              <a:rPr lang="ja-JP" altLang="en-US"/>
+              <a:t>進数の数列を</a:t>
+            </a:r>
+            <a:endParaRPr lang="en-US" altLang="ja-JP" dirty="0"/>
+          </a:p>
+          <a:p>
+            <a:r>
+              <a:rPr kumimoji="1" lang="ja-JP" altLang="en-US"/>
+              <a:t>音に変換</a:t>
+            </a:r>
+          </a:p>
+        </p:txBody>
+      </p:sp>
+      <p:sp>
+        <p:nvSpPr>
+          <p:cNvPr id="35" name="テキスト ボックス 34">
+            <a:extLst>
+              <a:ext uri="{FF2B5EF4-FFF2-40B4-BE49-F238E27FC236}">
+                <a16:creationId xmlns:a16="http://schemas.microsoft.com/office/drawing/2014/main" id="{52722AA8-1395-1FBC-E44F-D538E2715137}"/>
+              </a:ext>
+            </a:extLst>
+          </p:cNvPr>
+          <p:cNvSpPr txBox="1"/>
+          <p:nvPr/>
+        </p:nvSpPr>
+        <p:spPr>
+          <a:xfrm>
+            <a:off x="4684247" y="5364725"/>
+            <a:ext cx="2492990" cy="646331"/>
+          </a:xfrm>
+          <a:prstGeom prst="rect">
+            <a:avLst/>
+          </a:prstGeom>
+          <a:noFill/>
+        </p:spPr>
+        <p:txBody>
+          <a:bodyPr wrap="none" rtlCol="0">
+            <a:spAutoFit/>
+          </a:bodyPr>
+          <a:lstStyle/>
+          <a:p>
+            <a:r>
+              <a:rPr kumimoji="1" lang="ja-JP" altLang="en-US"/>
+              <a:t>各シンボルに対応した</a:t>
+            </a:r>
+            <a:endParaRPr kumimoji="1" lang="en-US" altLang="ja-JP" dirty="0"/>
+          </a:p>
+          <a:p>
+            <a:r>
+              <a:rPr kumimoji="1" lang="ja-JP" altLang="en-US"/>
+              <a:t>周波数の音を出力</a:t>
+            </a:r>
+          </a:p>
+        </p:txBody>
+      </p:sp>
+      <p:sp>
+        <p:nvSpPr>
+          <p:cNvPr id="37" name="テキスト ボックス 36">
+            <a:extLst>
+              <a:ext uri="{FF2B5EF4-FFF2-40B4-BE49-F238E27FC236}">
+                <a16:creationId xmlns:a16="http://schemas.microsoft.com/office/drawing/2014/main" id="{A1F939B0-21FB-097E-DF0D-9092C4D538B1}"/>
+              </a:ext>
+            </a:extLst>
+          </p:cNvPr>
+          <p:cNvSpPr txBox="1"/>
+          <p:nvPr/>
+        </p:nvSpPr>
+        <p:spPr>
+          <a:xfrm>
+            <a:off x="8902700" y="3429000"/>
+            <a:ext cx="1933543" cy="646331"/>
+          </a:xfrm>
+          <a:prstGeom prst="rect">
+            <a:avLst/>
+          </a:prstGeom>
+          <a:noFill/>
+        </p:spPr>
+        <p:txBody>
+          <a:bodyPr wrap="none" rtlCol="0">
+            <a:spAutoFit/>
+          </a:bodyPr>
+          <a:lstStyle/>
+          <a:p>
+            <a:r>
+              <a:rPr kumimoji="1" lang="ja-JP" altLang="en-US"/>
+              <a:t>周波数から</a:t>
+            </a:r>
+            <a:endParaRPr kumimoji="1" lang="en-US" altLang="ja-JP" dirty="0"/>
+          </a:p>
+          <a:p>
+            <a:r>
+              <a:rPr kumimoji="1" lang="en-US" altLang="ja-JP" dirty="0"/>
+              <a:t>4</a:t>
+            </a:r>
+            <a:r>
+              <a:rPr kumimoji="1" lang="ja-JP" altLang="en-US"/>
+              <a:t>進数数列に変換</a:t>
+            </a:r>
+          </a:p>
+        </p:txBody>
+      </p:sp>
+    </p:spTree>
+    <p:extLst>
+      <p:ext uri="{BB962C8B-B14F-4D97-AF65-F5344CB8AC3E}">
+        <p14:creationId xmlns:p14="http://schemas.microsoft.com/office/powerpoint/2010/main" val="1190285292"/>
+      </p:ext>
+    </p:extLst>
+  </p:cSld>
+  <p:clrMapOvr>
+    <a:masterClrMapping/>
+  </p:clrMapOvr>
+</p:sld>
+</file>
+
 <file path=ppt/theme/theme1.xml><?xml version="1.0" encoding="utf-8"?>
-<a:theme xmlns:a="http://schemas.openxmlformats.org/drawingml/2006/main" name="GradientRiseVTI">
+<a:theme xmlns:a="http://schemas.openxmlformats.org/drawingml/2006/main" name="Office テーマ">
   <a:themeElements>
-    <a:clrScheme name="GradientRiseVTI">
+    <a:clrScheme name="Office">
       <a:dk1>
         <a:sysClr val="windowText" lastClr="000000"/>
       </a:dk1>
       <a:lt1>
-        <a:srgbClr val="FFFFFF"/>
+        <a:sysClr val="window" lastClr="FFFFFF"/>
       </a:lt1>
       <a:dk2>
-        <a:srgbClr val="3C0F3A"/>
+        <a:srgbClr val="0E2841"/>
       </a:dk2>
       <a:lt2>
-        <a:srgbClr val="F1F2F2"/>
+        <a:srgbClr val="E8E8E8"/>
       </a:lt2>
       <a:accent1>
-        <a:srgbClr val="A6025C"/>
+        <a:srgbClr val="156082"/>
       </a:accent1>
       <a:accent2>
-        <a:srgbClr val="92248E"/>
+        <a:srgbClr val="E97132"/>
       </a:accent2>
       <a:accent3>
-        <a:srgbClr val="DE95C4"/>
+        <a:srgbClr val="196B24"/>
       </a:accent3>
       <a:accent4>
-        <a:srgbClr val="FE4A00"/>
+        <a:srgbClr val="0F9ED5"/>
       </a:accent4>
       <a:accent5>
-        <a:srgbClr val="DA002F"/>
+        <a:srgbClr val="A02B93"/>
       </a:accent5>
       <a:accent6>
-        <a:srgbClr val="FF907A"/>
+        <a:srgbClr val="4EA72E"/>
       </a:accent6>
       <a:hlink>
-        <a:srgbClr val="CA71E4"/>
+        <a:srgbClr val="467886"/>
       </a:hlink>
       <a:folHlink>
-        <a:srgbClr val="E45E49"/>
+        <a:srgbClr val="96607D"/>
       </a:folHlink>
     </a:clrScheme>
-    <a:fontScheme name="GradientRiseVTI">
+    <a:fontScheme name="Office">
       <a:majorFont>
-        <a:latin typeface="Avenir Next LT Pro"/>
+        <a:latin typeface="游ゴシック Light" panose="02110004020202020204"/>
         <a:ea typeface=""/>
         <a:cs typeface=""/>
+        <a:font script="Jpan" typeface="游ゴシック Light"/>
+        <a:font script="Hang" typeface="맑은 고딕"/>
+        <a:font script="Hans" typeface="等线 Light"/>
+        <a:font script="Hant" typeface="新細明體"/>
+        <a:font script="Arab" typeface="Times New Roman"/>
+        <a:font script="Hebr" typeface="Times New Roman"/>
+        <a:font script="Thai" typeface="Angsana New"/>
+        <a:font script="Ethi" typeface="Nyala"/>
+        <a:font script="Beng" typeface="Vrinda"/>
+        <a:font script="Gujr" typeface="Shruti"/>
+        <a:font script="Khmr" typeface="MoolBoran"/>
+        <a:font script="Knda" typeface="Tunga"/>
+        <a:font script="Guru" typeface="Raavi"/>
+        <a:font script="Cans" typeface="Euphemia"/>
+        <a:font script="Cher" typeface="Plantagenet Cherokee"/>
+        <a:font script="Yiii" typeface="Microsoft Yi Baiti"/>
+        <a:font script="Tibt" typeface="Microsoft Himalaya"/>
+        <a:font script="Thaa" typeface="MV Boli"/>
+        <a:font script="Deva" typeface="Mangal"/>
+        <a:font script="Telu" typeface="Gautami"/>
+        <a:font script="Taml" typeface="Latha"/>
+        <a:font script="Syrc" typeface="Estrangelo Edessa"/>
+        <a:font script="Orya" typeface="Kalinga"/>
+        <a:font script="Mlym" typeface="Kartika"/>
+        <a:font script="Laoo" typeface="DokChampa"/>
+        <a:font script="Sinh" typeface="Iskoola Pota"/>
+        <a:font script="Mong" typeface="Mongolian Baiti"/>
+        <a:font script="Viet" typeface="Times New Roman"/>
+        <a:font script="Uigh" typeface="Microsoft Uighur"/>
+        <a:font script="Geor" typeface="Sylfaen"/>
+        <a:font script="Armn" typeface="Arial"/>
+        <a:font script="Bugi" typeface="Leelawadee UI"/>
+        <a:font script="Bopo" typeface="Microsoft JhengHei"/>
+        <a:font script="Java" typeface="Javanese Text"/>
+        <a:font script="Lisu" typeface="Segoe UI"/>
+        <a:font script="Mymr" typeface="Myanmar Text"/>
+        <a:font script="Nkoo" typeface="Ebrima"/>
+        <a:font script="Olck" typeface="Nirmala UI"/>
+        <a:font script="Osma" typeface="Ebrima"/>
+        <a:font script="Phag" typeface="Phagspa"/>
+        <a:font script="Syrn" typeface="Estrangelo Edessa"/>
+        <a:font script="Syrj" typeface="Estrangelo Edessa"/>
+        <a:font script="Syre" typeface="Estrangelo Edessa"/>
+        <a:font script="Sora" typeface="Nirmala UI"/>
+        <a:font script="Tale" typeface="Microsoft Tai Le"/>
+        <a:font script="Talu" typeface="Microsoft New Tai Lue"/>
+        <a:font script="Tfng" typeface="Ebrima"/>
       </a:majorFont>
       <a:minorFont>
-        <a:latin typeface="Avenir Next LT Pro Light"/>
+        <a:latin typeface="游ゴシック" panose="02110004020202020204"/>
         <a:ea typeface=""/>
         <a:cs typeface=""/>
+        <a:font script="Jpan" typeface="游ゴシック"/>
+        <a:font script="Hang" typeface="맑은 고딕"/>
+        <a:font script="Hans" typeface="等线"/>
+        <a:font script="Hant" typeface="新細明體"/>
+        <a:font script="Arab" typeface="Arial"/>
+        <a:font script="Hebr" typeface="Arial"/>
+        <a:font script="Thai" typeface="Cordia New"/>
+        <a:font script="Ethi" typeface="Nyala"/>
+        <a:font script="Beng" typeface="Vrinda"/>
+        <a:font script="Gujr" typeface="Shruti"/>
+        <a:font script="Khmr" typeface="DaunPenh"/>
+        <a:font script="Knda" typeface="Tunga"/>
+        <a:font script="Guru" typeface="Raavi"/>
+        <a:font script="Cans" typeface="Euphemia"/>
+        <a:font script="Cher" typeface="Plantagenet Cherokee"/>
+        <a:font script="Yiii" typeface="Microsoft Yi Baiti"/>
+        <a:font script="Tibt" typeface="Microsoft Himalaya"/>
+        <a:font script="Thaa" typeface="MV Boli"/>
+        <a:font script="Deva" typeface="Mangal"/>
+        <a:font script="Telu" typeface="Gautami"/>
+        <a:font script="Taml" typeface="Latha"/>
+        <a:font script="Syrc" typeface="Estrangelo Edessa"/>
+        <a:font script="Orya" typeface="Kalinga"/>
+        <a:font script="Mlym" typeface="Kartika"/>
+        <a:font script="Laoo" typeface="DokChampa"/>
+        <a:font script="Sinh" typeface="Iskoola Pota"/>
+        <a:font script="Mong" typeface="Mongolian Baiti"/>
+        <a:font script="Viet" typeface="Arial"/>
+        <a:font script="Uigh" typeface="Microsoft Uighur"/>
+        <a:font script="Geor" typeface="Sylfaen"/>
+        <a:font script="Armn" typeface="Arial"/>
+        <a:font script="Bugi" typeface="Leelawadee UI"/>
+        <a:font script="Bopo" typeface="Microsoft JhengHei"/>
+        <a:font script="Java" typeface="Javanese Text"/>
+        <a:font script="Lisu" typeface="Segoe UI"/>
+        <a:font script="Mymr" typeface="Myanmar Text"/>
+        <a:font script="Nkoo" typeface="Ebrima"/>
+        <a:font script="Olck" typeface="Nirmala UI"/>
+        <a:font script="Osma" typeface="Ebrima"/>
+        <a:font script="Phag" typeface="Phagspa"/>
+        <a:font script="Syrn" typeface="Estrangelo Edessa"/>
+        <a:font script="Syrj" typeface="Estrangelo Edessa"/>
+        <a:font script="Syre" typeface="Estrangelo Edessa"/>
+        <a:font script="Sora" typeface="Nirmala UI"/>
+        <a:font script="Tale" typeface="Microsoft Tai Le"/>
+        <a:font script="Talu" typeface="Microsoft New Tai Lue"/>
+        <a:font script="Tfng" typeface="Ebrima"/>
       </a:minorFont>
     </a:fontScheme>
-    <a:fmtScheme name="GradientRiseVTI">
+    <a:fmtScheme name="Office">
       <a:fillStyleLst>
         <a:solidFill>
           <a:schemeClr val="phClr"/>
@@ -9542,13 +10322,6 @@
         </a:gradFill>
       </a:fillStyleLst>
       <a:lnStyleLst>
-        <a:ln w="6350" cap="flat" cmpd="sng" algn="ctr">
-          <a:solidFill>
-            <a:schemeClr val="phClr"/>
-          </a:solidFill>
-          <a:prstDash val="solid"/>
-          <a:miter lim="800000"/>
-        </a:ln>
         <a:ln w="12700" cap="flat" cmpd="sng" algn="ctr">
           <a:solidFill>
             <a:schemeClr val="phClr"/>
@@ -9557,6 +10330,13 @@
           <a:miter lim="800000"/>
         </a:ln>
         <a:ln w="19050" cap="flat" cmpd="sng" algn="ctr">
+          <a:solidFill>
+            <a:schemeClr val="phClr"/>
+          </a:solidFill>
+          <a:prstDash val="solid"/>
+          <a:miter lim="800000"/>
+        </a:ln>
+        <a:ln w="25400" cap="flat" cmpd="sng" algn="ctr">
           <a:solidFill>
             <a:schemeClr val="phClr"/>
           </a:solidFill>
@@ -9621,11 +10401,31 @@
       </a:bgFillStyleLst>
     </a:fmtScheme>
   </a:themeElements>
-  <a:objectDefaults/>
+  <a:objectDefaults>
+    <a:lnDef>
+      <a:spPr/>
+      <a:bodyPr/>
+      <a:lstStyle/>
+      <a:style>
+        <a:lnRef idx="2">
+          <a:schemeClr val="accent1"/>
+        </a:lnRef>
+        <a:fillRef idx="0">
+          <a:schemeClr val="accent1"/>
+        </a:fillRef>
+        <a:effectRef idx="1">
+          <a:schemeClr val="accent1"/>
+        </a:effectRef>
+        <a:fontRef idx="minor">
+          <a:schemeClr val="tx1"/>
+        </a:fontRef>
+      </a:style>
+    </a:lnDef>
+  </a:objectDefaults>
   <a:extraClrSchemeLst/>
   <a:extLst>
     <a:ext uri="{05A4C25C-085E-4340-85A3-A5531E510DB2}">
-      <thm15:themeFamily xmlns:thm15="http://schemas.microsoft.com/office/thememl/2012/main" name="GradientRiseVTI" id="{13C68A69-E745-489A-84EC-B7BCE4AA380B}" vid="{9CF7857A-9412-4E45-AB0D-6EAA5A7DC4C5}"/>
+      <thm15:themeFamily xmlns:thm15="http://schemas.microsoft.com/office/thememl/2012/main" name="Office Theme" id="{2E142A2C-CD16-42D6-873A-C26D2A0506FA}" vid="{1BDDFF52-6CD6-40A5-AB3C-68EB2F1E4D0A}"/>
     </a:ext>
   </a:extLst>
 </a:theme>
